--- a/lecons/LSA/Meteorology/05_LSA_MET_L05_Heat_Transport.pptx
+++ b/lecons/LSA/Meteorology/05_LSA_MET_L05_Heat_Transport.pptx
@@ -61,11 +61,9 @@
     <p:sldId id="309" r:id="rId55"/>
     <p:sldId id="310" r:id="rId56"/>
     <p:sldId id="311" r:id="rId57"/>
-    <p:sldId id="312" r:id="rId58"/>
-    <p:sldId id="313" r:id="rId59"/>
   </p:sldIdLst>
   <p:notesMasterIdLst>
-    <p:notesMasterId r:id="rId60"/>
+    <p:notesMasterId r:id="rId58"/>
   </p:notesMasterIdLst>
   <p:sldSz cx="12192000" cy="6858000"/>
   <p:notesSz cx="6858000" cy="12192000"/>
@@ -3199,7 +3197,7 @@
           <a:p>
             <a:r>
               <a:rPr lang="en-US" dirty="0"/>
-              <a:t>We continue with the definitions. On this slide we have Conduction and Convection. Write each point on a new line, with the key term first, and explain it in your own words when we revise. When you finish, we go to the next slide.</a:t>
+              <a:t>We continue with the definitions. On this slide we have Sensible heat flux and Latent heat flux. Write each point on a new line, with the key term first, and explain it in your own words when we revise. When you finish, we go to the next slide.</a:t>
             </a:r>
             <a:endParaRPr lang="en-US" dirty="0"/>
           </a:p>
@@ -3287,7 +3285,7 @@
           <a:p>
             <a:r>
               <a:rPr lang="en-US" dirty="0"/>
-              <a:t>We continue with the definitions. On this slide we have Latent heat. Write each point on a new line, with the key term first, and explain it in your own words when we revise.</a:t>
+              <a:t>We continue with the definitions. On this slide we have Conduction and Convection. Write each point on a new line, with the key term first, and explain it in your own words when we revise.</a:t>
             </a:r>
             <a:endParaRPr lang="en-US" dirty="0"/>
           </a:p>
@@ -3375,7 +3373,7 @@
           <a:p>
             <a:r>
               <a:rPr lang="en-US" dirty="0"/>
-              <a:t>Let us copy Horizontal Heat Transfer. Heat is transferred horizontally in the following ways. Copy the point on Advection by air masses on the left, then draw the diagram on the right: how heat moves. Give it a title and label it clearly.</a:t>
+              <a:t>Let us copy Horizontal Heat Transfer. Heat is transferred horizontally in the following ways. Copy the point on Advection by air masses and winds on the left, then draw the diagram on the right: advection by air masses. Give it a title and label it clearly.</a:t>
             </a:r>
             <a:endParaRPr lang="en-US" dirty="0"/>
           </a:p>
@@ -3551,7 +3549,7 @@
           <a:p>
             <a:r>
               <a:rPr lang="en-US" dirty="0"/>
-              <a:t>Copy the point on Example on the left, then draw the diagram on the right: harmattan haze. Give it a title and label it clearly.</a:t>
+              <a:t>Copy the point on Transfer by ocean currents on the left, then draw the diagram on the right: ocean currents. Give it a title and label it clearly.</a:t>
             </a:r>
             <a:endParaRPr lang="en-US" dirty="0"/>
           </a:p>
@@ -3639,7 +3637,7 @@
           <a:p>
             <a:r>
               <a:rPr lang="en-US" dirty="0"/>
-              <a:t>We continue with Horizontal Heat Transfer. On this slide we have Ocean currents. Write each point on a new line, with the key term first, and explain it in your own words when we revise.</a:t>
+              <a:t>Let us copy Vertical Heat Transfer. The lower atmosphere obtains and keeps its heat in the following ways. Copy the point on Absorption of radiation on the left, then draw the diagram on the right: the air heated from below. Give it a title and label it clearly.</a:t>
             </a:r>
             <a:endParaRPr lang="en-US" dirty="0"/>
           </a:p>
@@ -3727,7 +3725,7 @@
           <a:p>
             <a:r>
               <a:rPr lang="en-US" dirty="0"/>
-              <a:t>Copy the point on Example on the left, then draw the diagram on the right: ocean currents. Give it a title and label it clearly.</a:t>
+              <a:t>We continue with Vertical Heat Transfer. Copy the point on Conduction: write the key term first, then its explanation.</a:t>
             </a:r>
             <a:endParaRPr lang="en-US" dirty="0"/>
           </a:p>
@@ -3815,7 +3813,7 @@
           <a:p>
             <a:r>
               <a:rPr lang="en-US" dirty="0"/>
-              <a:t>Let us copy Vertical Heat Transfer. Heat is transferred vertically in the following ways. Copy the point on Heated from below on the left, then draw the diagram on the right: the atmosphere is heated from below. Give it a title and label it clearly.</a:t>
+              <a:t>Copy the point on Convection on the left, then draw the diagram on the right: convection currents. Give it a title and label it clearly.</a:t>
             </a:r>
             <a:endParaRPr lang="en-US" dirty="0"/>
           </a:p>
@@ -3903,7 +3901,7 @@
           <a:p>
             <a:r>
               <a:rPr lang="en-US" dirty="0"/>
-              <a:t>We continue with Vertical Heat Transfer. On this slide we have Conduction. Write each point on a new line, with the key term first, and explain it in your own words when we revise.</a:t>
+              <a:t>Copy the point on Latent heat of vaporisation on the left, then draw the diagram on the right: evaporation. Give it a title and label it clearly.</a:t>
             </a:r>
             <a:endParaRPr lang="en-US" dirty="0"/>
           </a:p>
@@ -3991,7 +3989,7 @@
           <a:p>
             <a:r>
               <a:rPr lang="en-US" dirty="0"/>
-              <a:t>Copy the point on Convection on the left, then draw the diagram on the right: convection. Give it a title and label it clearly.</a:t>
+              <a:t>Now let us check what you have understood. Question 1: Distinguish advection from convection. Answer in your exercise book.</a:t>
             </a:r>
             <a:endParaRPr lang="en-US" dirty="0"/>
           </a:p>
@@ -4079,7 +4077,7 @@
           <a:p>
             <a:r>
               <a:rPr lang="en-US" dirty="0"/>
-              <a:t>Copy the point on Latent heat on the left, then draw the diagram on the right: steam rising. Give it a title and label it clearly.</a:t>
+              <a:t>The expected answer is: advection is horizontal transfer of heat by wind; convection is vertical transfer by rising and sinking air. If you got it right, well done.</a:t>
             </a:r>
             <a:endParaRPr lang="en-US" dirty="0"/>
           </a:p>
@@ -4167,7 +4165,7 @@
           <a:p>
             <a:r>
               <a:rPr lang="en-US" dirty="0"/>
-              <a:t>Now let us check what you have understood. Question 1: Distinguish advection from convection. Answer in your exercise book.</a:t>
+              <a:t>Now let us check what you have understood. Question 2: Why is the atmosphere said to be heated from below? Answer in your exercise book.</a:t>
             </a:r>
             <a:endParaRPr lang="en-US" dirty="0"/>
           </a:p>
@@ -4255,7 +4253,7 @@
           <a:p>
             <a:r>
               <a:rPr lang="en-US" dirty="0"/>
-              <a:t>The expected answer is: advection is horizontal transfer of heat by wind; convection is vertical transfer by rising and sinking air. If you got it right, well done.</a:t>
+              <a:t>The expected answer is: sunlight heats the ground first, and the ground then heats the air by radiation, conduction and convection. If you got it right, well done.</a:t>
             </a:r>
             <a:endParaRPr lang="en-US" dirty="0"/>
           </a:p>
@@ -4343,7 +4341,7 @@
           <a:p>
             <a:r>
               <a:rPr lang="en-US" dirty="0"/>
-              <a:t>Now let us check what you have understood. Question 2: Why is the atmosphere said to be heated from below? Answer in your exercise book.</a:t>
+              <a:t>For those who need more practice, fill in the blanks in your exercise book. The answers are: number 1, conduction; number 2, convection; number 3, latent.</a:t>
             </a:r>
             <a:endParaRPr lang="en-US" dirty="0"/>
           </a:p>
@@ -4519,7 +4517,7 @@
           <a:p>
             <a:r>
               <a:rPr lang="en-US" dirty="0"/>
-              <a:t>The expected answer is: sunlight heats the ground first, and the ground then heats the air by radiation, conduction and convection. If you got it right, well done.</a:t>
+              <a:t>For your homework: State how temperature changes from the Equator to the poles. We shall correct it at the beginning of our next lesson.</a:t>
             </a:r>
             <a:endParaRPr lang="en-US" dirty="0"/>
           </a:p>
@@ -4607,7 +4605,7 @@
           <a:p>
             <a:r>
               <a:rPr lang="en-US" dirty="0"/>
-              <a:t>For those who need more practice, fill in the blanks in your exercise book. The answers are: number 1, conduction; number 2, convection; number 3, latent.</a:t>
+              <a:t>Our next lesson will be on Lesson 6: Latitudinal Distribution of Temperature. Thank you for your attention, and see you next time.</a:t>
             </a:r>
             <a:endParaRPr lang="en-US" dirty="0"/>
           </a:p>
@@ -4695,7 +4693,7 @@
           <a:p>
             <a:r>
               <a:rPr lang="en-US" dirty="0"/>
-              <a:t>For your homework: State how temperature changes from the Equator to the poles. We shall correct it at the beginning of our next lesson.</a:t>
+              <a:t>Let us play the bilingual game. I say a word in English, and you give me the French word. Then we do the reverse.</a:t>
             </a:r>
             <a:endParaRPr lang="en-US" dirty="0"/>
           </a:p>
@@ -4783,7 +4781,7 @@
           <a:p>
             <a:r>
               <a:rPr lang="en-US" dirty="0"/>
-              <a:t>Our next lesson will be on Lesson 6: Latitudinal Distribution of Temperature. Thank you for your attention, and see you next time.</a:t>
+              <a:t>I record this information in the official logbook of the class after the lesson.</a:t>
             </a:r>
             <a:endParaRPr lang="en-US" dirty="0"/>
           </a:p>
@@ -4871,7 +4869,7 @@
           <a:p>
             <a:r>
               <a:rPr lang="en-US" dirty="0"/>
-              <a:t>Let us play the bilingual game. I say a word in English, and you give me the French word. Then we do the reverse.</a:t>
+              <a:t>I complete the second page of the logbook: the matter taught, the evaluation, the homework and the attendance.</a:t>
             </a:r>
             <a:endParaRPr lang="en-US" dirty="0"/>
           </a:p>
@@ -4959,7 +4957,7 @@
           <a:p>
             <a:r>
               <a:rPr lang="en-US" dirty="0"/>
-              <a:t>I record this information in the official logbook of the class after the lesson.</a:t>
+              <a:t>This slide is for me, the teacher: it gives the timing of the lesson and what to do if the projector is not available.</a:t>
             </a:r>
             <a:endParaRPr lang="en-US" dirty="0"/>
           </a:p>
@@ -5047,7 +5045,7 @@
           <a:p>
             <a:r>
               <a:rPr lang="en-US" dirty="0"/>
-              <a:t>I complete the second page of the logbook: the matter taught, the evaluation, the homework and the attendance.</a:t>
+              <a:t>These are the references and picture credits used to prepare this lesson.</a:t>
             </a:r>
             <a:endParaRPr lang="en-US" dirty="0"/>
           </a:p>
@@ -5071,182 +5069,6 @@
             <a:fld id="{F7021451-1387-4CA6-816F-3879F97B5CBC}" type="slidenum">
               <a:rPr lang="en-US"/>
               <a:t>56</a:t>
-            </a:fld>
-            <a:endParaRPr lang="en-US"/>
-          </a:p>
-        </p:txBody>
-      </p:sp>
-    </p:spTree>
-    <p:extLst>
-      <p:ext uri="{BB962C8B-B14F-4D97-AF65-F5344CB8AC3E}">
-        <p14:creationId xmlns:p14="http://schemas.microsoft.com/office/powerpoint/2010/main" val="1024086991"/>
-      </p:ext>
-    </p:extLst>
-  </p:cSld>
-  <p:clrMapOvr>
-    <a:masterClrMapping/>
-  </p:clrMapOvr>
-</p:notes>
-</file>
-
-<file path=ppt/notesSlides/notesSlide57.xml><?xml version="1.0" encoding="utf-8"?>
-<p:notes xmlns:a="http://schemas.openxmlformats.org/drawingml/2006/main" xmlns:r="http://schemas.openxmlformats.org/officeDocument/2006/relationships" xmlns:p="http://schemas.openxmlformats.org/presentationml/2006/main">
-  <p:cSld>
-    <p:spTree>
-      <p:nvGrpSpPr>
-        <p:cNvPr id="1" name=""/>
-        <p:cNvGrpSpPr/>
-        <p:nvPr/>
-      </p:nvGrpSpPr>
-      <p:grpSpPr>
-        <a:xfrm>
-          <a:off x="0" y="0"/>
-          <a:ext cx="0" cy="0"/>
-          <a:chOff x="0" y="0"/>
-          <a:chExt cx="0" cy="0"/>
-        </a:xfrm>
-      </p:grpSpPr>
-      <p:sp>
-        <p:nvSpPr>
-          <p:cNvPr id="2" name="Slide Image Placeholder 1"/>
-          <p:cNvSpPr>
-            <a:spLocks noGrp="1" noRot="1" noChangeAspect="1"/>
-          </p:cNvSpPr>
-          <p:nvPr>
-            <p:ph type="sldImg"/>
-          </p:nvPr>
-        </p:nvSpPr>
-        <p:spPr/>
-      </p:sp>
-      <p:sp>
-        <p:nvSpPr>
-          <p:cNvPr id="3" name="Notes Placeholder 2"/>
-          <p:cNvSpPr>
-            <a:spLocks noGrp="1"/>
-          </p:cNvSpPr>
-          <p:nvPr>
-            <p:ph type="body" idx="1"/>
-          </p:nvPr>
-        </p:nvSpPr>
-        <p:spPr/>
-        <p:txBody>
-          <a:bodyPr/>
-          <a:lstStyle/>
-          <a:p>
-            <a:r>
-              <a:rPr lang="en-US" dirty="0"/>
-              <a:t>This slide is for me, the teacher: it gives the timing of the lesson and what to do if the projector is not available.</a:t>
-            </a:r>
-            <a:endParaRPr lang="en-US" dirty="0"/>
-          </a:p>
-        </p:txBody>
-      </p:sp>
-      <p:sp>
-        <p:nvSpPr>
-          <p:cNvPr id="4" name="Slide Number Placeholder 3"/>
-          <p:cNvSpPr>
-            <a:spLocks noGrp="1"/>
-          </p:cNvSpPr>
-          <p:nvPr>
-            <p:ph type="sldNum" sz="quarter" idx="10"/>
-          </p:nvPr>
-        </p:nvSpPr>
-        <p:spPr/>
-        <p:txBody>
-          <a:bodyPr/>
-          <a:lstStyle/>
-          <a:p>
-            <a:fld id="{F7021451-1387-4CA6-816F-3879F97B5CBC}" type="slidenum">
-              <a:rPr lang="en-US"/>
-              <a:t>57</a:t>
-            </a:fld>
-            <a:endParaRPr lang="en-US"/>
-          </a:p>
-        </p:txBody>
-      </p:sp>
-    </p:spTree>
-    <p:extLst>
-      <p:ext uri="{BB962C8B-B14F-4D97-AF65-F5344CB8AC3E}">
-        <p14:creationId xmlns:p14="http://schemas.microsoft.com/office/powerpoint/2010/main" val="1024086991"/>
-      </p:ext>
-    </p:extLst>
-  </p:cSld>
-  <p:clrMapOvr>
-    <a:masterClrMapping/>
-  </p:clrMapOvr>
-</p:notes>
-</file>
-
-<file path=ppt/notesSlides/notesSlide58.xml><?xml version="1.0" encoding="utf-8"?>
-<p:notes xmlns:a="http://schemas.openxmlformats.org/drawingml/2006/main" xmlns:r="http://schemas.openxmlformats.org/officeDocument/2006/relationships" xmlns:p="http://schemas.openxmlformats.org/presentationml/2006/main">
-  <p:cSld>
-    <p:spTree>
-      <p:nvGrpSpPr>
-        <p:cNvPr id="1" name=""/>
-        <p:cNvGrpSpPr/>
-        <p:nvPr/>
-      </p:nvGrpSpPr>
-      <p:grpSpPr>
-        <a:xfrm>
-          <a:off x="0" y="0"/>
-          <a:ext cx="0" cy="0"/>
-          <a:chOff x="0" y="0"/>
-          <a:chExt cx="0" cy="0"/>
-        </a:xfrm>
-      </p:grpSpPr>
-      <p:sp>
-        <p:nvSpPr>
-          <p:cNvPr id="2" name="Slide Image Placeholder 1"/>
-          <p:cNvSpPr>
-            <a:spLocks noGrp="1" noRot="1" noChangeAspect="1"/>
-          </p:cNvSpPr>
-          <p:nvPr>
-            <p:ph type="sldImg"/>
-          </p:nvPr>
-        </p:nvSpPr>
-        <p:spPr/>
-      </p:sp>
-      <p:sp>
-        <p:nvSpPr>
-          <p:cNvPr id="3" name="Notes Placeholder 2"/>
-          <p:cNvSpPr>
-            <a:spLocks noGrp="1"/>
-          </p:cNvSpPr>
-          <p:nvPr>
-            <p:ph type="body" idx="1"/>
-          </p:nvPr>
-        </p:nvSpPr>
-        <p:spPr/>
-        <p:txBody>
-          <a:bodyPr/>
-          <a:lstStyle/>
-          <a:p>
-            <a:r>
-              <a:rPr lang="en-US" dirty="0"/>
-              <a:t>These are the references and picture credits used to prepare this lesson.</a:t>
-            </a:r>
-            <a:endParaRPr lang="en-US" dirty="0"/>
-          </a:p>
-        </p:txBody>
-      </p:sp>
-      <p:sp>
-        <p:nvSpPr>
-          <p:cNvPr id="4" name="Slide Number Placeholder 3"/>
-          <p:cNvSpPr>
-            <a:spLocks noGrp="1"/>
-          </p:cNvSpPr>
-          <p:nvPr>
-            <p:ph type="sldNum" sz="quarter" idx="10"/>
-          </p:nvPr>
-        </p:nvSpPr>
-        <p:spPr/>
-        <p:txBody>
-          <a:bodyPr/>
-          <a:lstStyle/>
-          <a:p>
-            <a:fld id="{F7021451-1387-4CA6-816F-3879F97B5CBC}" type="slidenum">
-              <a:rPr lang="en-US"/>
-              <a:t>58</a:t>
             </a:fld>
             <a:endParaRPr lang="en-US"/>
           </a:p>
@@ -14581,7 +14403,7 @@
         <p:spPr>
           <a:xfrm>
             <a:off x="0" y="658368"/>
-            <a:ext cx="5120640" cy="5833872"/>
+            <a:ext cx="3840480" cy="5833872"/>
           </a:xfrm>
           <a:prstGeom prst="rect">
             <a:avLst/>
@@ -14596,8 +14418,8 @@
         </p:nvSpPr>
         <p:spPr>
           <a:xfrm>
-            <a:off x="5349240" y="1005840"/>
-            <a:ext cx="6522415" cy="731520"/>
+            <a:off x="4069080" y="1005840"/>
+            <a:ext cx="7802575" cy="731520"/>
           </a:xfrm>
           <a:prstGeom prst="rect">
             <a:avLst/>
@@ -14637,8 +14459,8 @@
         </p:nvSpPr>
         <p:spPr>
           <a:xfrm>
-            <a:off x="5349240" y="1783080"/>
-            <a:ext cx="6522415" cy="4663440"/>
+            <a:off x="4069080" y="1783080"/>
+            <a:ext cx="7802575" cy="4663440"/>
           </a:xfrm>
           <a:prstGeom prst="rect">
             <a:avLst/>
@@ -14665,7 +14487,7 @@
                 <a:ea typeface="Times New Roman" pitchFamily="34" charset="-122"/>
                 <a:cs typeface="Times New Roman" pitchFamily="34" charset="-120"/>
               </a:rPr>
-              <a:t>Conduction: </a:t>
+              <a:t>Sensible heat flux: </a:t>
             </a:r>
             <a:pPr algn="l" indent="0" marL="0">
               <a:spcAft>
@@ -14682,7 +14504,7 @@
                 <a:ea typeface="Times New Roman" pitchFamily="34" charset="-122"/>
                 <a:cs typeface="Times New Roman" pitchFamily="34" charset="-120"/>
               </a:rPr>
-              <a:t>It is the transfer of heat by direct contact.</a:t>
+              <a:t>It is the heat carried by air that we can feel and measure with a thermometer.</a:t>
             </a:r>
             <a:endParaRPr lang="en-US" sz="4000" dirty="0"/>
           </a:p>
@@ -14702,7 +14524,7 @@
                 <a:ea typeface="Times New Roman" pitchFamily="34" charset="-122"/>
                 <a:cs typeface="Times New Roman" pitchFamily="34" charset="-120"/>
               </a:rPr>
-              <a:t>Convection: </a:t>
+              <a:t>Latent heat flux: </a:t>
             </a:r>
             <a:pPr algn="l" indent="0" marL="0">
               <a:spcAft>
@@ -14719,7 +14541,7 @@
                 <a:ea typeface="Times New Roman" pitchFamily="34" charset="-122"/>
                 <a:cs typeface="Times New Roman" pitchFamily="34" charset="-120"/>
               </a:rPr>
-              <a:t>It is the vertical transfer of heat by rising warm air and sinking cool air.</a:t>
+              <a:t>It is the heat carried in water vapour, taken during evaporation and released during condensation.</a:t>
             </a:r>
             <a:endParaRPr lang="en-US" sz="4000" dirty="0"/>
           </a:p>
@@ -14938,7 +14760,7 @@
                 <a:ea typeface="Times New Roman" pitchFamily="34" charset="-122"/>
                 <a:cs typeface="Times New Roman" pitchFamily="34" charset="-120"/>
               </a:rPr>
-              <a:t>Latent heat: </a:t>
+              <a:t>Conduction: </a:t>
             </a:r>
             <a:pPr algn="l" indent="0" marL="0">
               <a:spcAft>
@@ -14955,7 +14777,44 @@
                 <a:ea typeface="Times New Roman" pitchFamily="34" charset="-122"/>
                 <a:cs typeface="Times New Roman" pitchFamily="34" charset="-120"/>
               </a:rPr>
-              <a:t>It is the "hidden" heat stored in water vapour during evaporation and released during condensation.</a:t>
+              <a:t>It is the transfer of heat by direct contact.</a:t>
+            </a:r>
+            <a:endParaRPr lang="en-US" sz="4000" dirty="0"/>
+          </a:p>
+          <a:p>
+            <a:pPr algn="l" indent="0" marL="0">
+              <a:spcAft>
+                <a:spcPts val="800"/>
+              </a:spcAft>
+              <a:buNone/>
+            </a:pPr>
+            <a:r>
+              <a:rPr lang="en-US" sz="4000" b="1" dirty="0">
+                <a:solidFill>
+                  <a:srgbClr val="111111"/>
+                </a:solidFill>
+                <a:latin typeface="Times New Roman" pitchFamily="34" charset="0"/>
+                <a:ea typeface="Times New Roman" pitchFamily="34" charset="-122"/>
+                <a:cs typeface="Times New Roman" pitchFamily="34" charset="-120"/>
+              </a:rPr>
+              <a:t>Convection: </a:t>
+            </a:r>
+            <a:pPr algn="l" indent="0" marL="0">
+              <a:spcAft>
+                <a:spcPts val="800"/>
+              </a:spcAft>
+              <a:buNone/>
+            </a:pPr>
+            <a:r>
+              <a:rPr lang="en-US" sz="4000" dirty="0">
+                <a:solidFill>
+                  <a:srgbClr val="111111"/>
+                </a:solidFill>
+                <a:latin typeface="Times New Roman" pitchFamily="34" charset="0"/>
+                <a:ea typeface="Times New Roman" pitchFamily="34" charset="-122"/>
+                <a:cs typeface="Times New Roman" pitchFamily="34" charset="-120"/>
+              </a:rPr>
+              <a:t>It is the vertical transfer of heat by rising warm air and sinking cool air.</a:t>
             </a:r>
             <a:endParaRPr lang="en-US" sz="4000" dirty="0"/>
           </a:p>
@@ -15123,7 +14982,7 @@
         <p:spPr>
           <a:xfrm>
             <a:off x="365760" y="1783080"/>
-            <a:ext cx="4846320" cy="4617720"/>
+            <a:ext cx="6035040" cy="4617720"/>
           </a:xfrm>
           <a:prstGeom prst="rect">
             <a:avLst/>
@@ -15142,7 +15001,7 @@
               <a:buNone/>
             </a:pPr>
             <a:r>
-              <a:rPr lang="en-US" sz="3400" i="1" dirty="0">
+              <a:rPr lang="en-US" sz="2800" i="1" dirty="0">
                 <a:solidFill>
                   <a:srgbClr val="111111"/>
                 </a:solidFill>
@@ -15152,7 +15011,7 @@
               </a:rPr>
               <a:t>Heat is transferred horizontally in the following ways:</a:t>
             </a:r>
-            <a:endParaRPr lang="en-US" sz="3400" dirty="0"/>
+            <a:endParaRPr lang="en-US" sz="2800" dirty="0"/>
           </a:p>
           <a:p>
             <a:pPr algn="l" indent="0" marL="0">
@@ -15162,7 +15021,7 @@
               <a:buNone/>
             </a:pPr>
             <a:r>
-              <a:rPr lang="en-US" sz="3400" b="1" dirty="0">
+              <a:rPr lang="en-US" sz="2800" b="1" dirty="0">
                 <a:solidFill>
                   <a:srgbClr val="111111"/>
                 </a:solidFill>
@@ -15170,7 +15029,7 @@
                 <a:ea typeface="Times New Roman" pitchFamily="34" charset="-122"/>
                 <a:cs typeface="Times New Roman" pitchFamily="34" charset="-120"/>
               </a:rPr>
-              <a:t>Advection by air masses: </a:t>
+              <a:t>Advection by air masses and winds: </a:t>
             </a:r>
             <a:pPr algn="l" indent="0" marL="0">
               <a:spcAft>
@@ -15179,7 +15038,7 @@
               <a:buNone/>
             </a:pPr>
             <a:r>
-              <a:rPr lang="en-US" sz="3400" dirty="0">
+              <a:rPr lang="en-US" sz="2800" dirty="0">
                 <a:solidFill>
                   <a:srgbClr val="111111"/>
                 </a:solidFill>
@@ -15187,9 +15046,9 @@
                 <a:ea typeface="Times New Roman" pitchFamily="34" charset="-122"/>
                 <a:cs typeface="Times New Roman" pitchFamily="34" charset="-120"/>
               </a:rPr>
-              <a:t>An air mass takes the character of its source and carries its heat and moisture when it moves.</a:t>
-            </a:r>
-            <a:endParaRPr lang="en-US" sz="3400" dirty="0"/>
+              <a:t>An air mass takes the heat and moisture of its source region and carries them when it moves. For example, the Harmattan brings hot, dry and dusty Saharan air to Garoua in the dry season, while the monsoon brings warm, moist air from the Atlantic.</a:t>
+            </a:r>
+            <a:endParaRPr lang="en-US" sz="2800" dirty="0"/>
           </a:p>
         </p:txBody>
       </p:sp>
@@ -15209,8 +15068,8 @@
         </p:blipFill>
         <p:spPr>
           <a:xfrm>
-            <a:off x="5349240" y="2617506"/>
-            <a:ext cx="6659575" cy="2601397"/>
+            <a:off x="6537960" y="2849678"/>
+            <a:ext cx="5470855" cy="2137053"/>
           </a:xfrm>
           <a:prstGeom prst="rect">
             <a:avLst/>
@@ -15225,8 +15084,8 @@
         </p:nvSpPr>
         <p:spPr>
           <a:xfrm>
-            <a:off x="5349240" y="6089904"/>
-            <a:ext cx="6659575" cy="347472"/>
+            <a:off x="6537960" y="6089904"/>
+            <a:ext cx="5470855" cy="347472"/>
           </a:xfrm>
           <a:prstGeom prst="rect">
             <a:avLst/>
@@ -15250,7 +15109,7 @@
                 <a:ea typeface="Times New Roman" pitchFamily="34" charset="-122"/>
                 <a:cs typeface="Times New Roman" pitchFamily="34" charset="-120"/>
               </a:rPr>
-              <a:t>Illustration: how heat moves</a:t>
+              <a:t>Illustration: advection by air masses</a:t>
             </a:r>
             <a:endParaRPr lang="en-US" sz="1600" dirty="0"/>
           </a:p>
@@ -15657,7 +15516,7 @@
         <p:spPr>
           <a:xfrm>
             <a:off x="365760" y="1783080"/>
-            <a:ext cx="4846320" cy="4617720"/>
+            <a:ext cx="6035040" cy="4617720"/>
           </a:xfrm>
           <a:prstGeom prst="rect">
             <a:avLst/>
@@ -15676,7 +15535,7 @@
               <a:buNone/>
             </a:pPr>
             <a:r>
-              <a:rPr lang="en-US" sz="3600" b="1" dirty="0">
+              <a:rPr lang="en-US" sz="3200" b="1" dirty="0">
                 <a:solidFill>
                   <a:srgbClr val="111111"/>
                 </a:solidFill>
@@ -15684,7 +15543,7 @@
                 <a:ea typeface="Times New Roman" pitchFamily="34" charset="-122"/>
                 <a:cs typeface="Times New Roman" pitchFamily="34" charset="-120"/>
               </a:rPr>
-              <a:t>Example: </a:t>
+              <a:t>Transfer by ocean currents: </a:t>
             </a:r>
             <a:pPr algn="l" indent="0" marL="0">
               <a:spcAft>
@@ -15693,7 +15552,7 @@
               <a:buNone/>
             </a:pPr>
             <a:r>
-              <a:rPr lang="en-US" sz="3600" dirty="0">
+              <a:rPr lang="en-US" sz="3200" dirty="0">
                 <a:solidFill>
                   <a:srgbClr val="111111"/>
                 </a:solidFill>
@@ -15701,15 +15560,15 @@
                 <a:ea typeface="Times New Roman" pitchFamily="34" charset="-122"/>
                 <a:cs typeface="Times New Roman" pitchFamily="34" charset="-120"/>
               </a:rPr>
-              <a:t>The Harmattan carries hot, dry and dusty Saharan air to Garoua in the dry season.</a:t>
-            </a:r>
-            <a:endParaRPr lang="en-US" sz="3600" dirty="0"/>
+              <a:t>Warm currents carry heat from the tropics towards the poles, and cold currents bring cool water towards the Equator. For example, the warm Guinea Current keeps the coast of Cameroon warm and humid, while the cold Benguela Current cools the coast of Namibia.</a:t>
+            </a:r>
+            <a:endParaRPr lang="en-US" sz="3200" dirty="0"/>
           </a:p>
         </p:txBody>
       </p:sp>
       <p:pic>
         <p:nvPicPr>
-          <p:cNvPr id="5" name="Image 0" descr="/home/claude/f4/img/v2/f2t_harmattan.jpg">    </p:cNvPr>
+          <p:cNvPr id="5" name="Image 0" descr="/home/claude/f4/img/v2/ocean_currents_big.png">    </p:cNvPr>
           <p:cNvPicPr>
             <a:picLocks noChangeAspect="1"/>
           </p:cNvPicPr>
@@ -15723,8 +15582,8 @@
         </p:blipFill>
         <p:spPr>
           <a:xfrm>
-            <a:off x="5349240" y="2071212"/>
-            <a:ext cx="6659575" cy="3693983"/>
+            <a:off x="6537960" y="2550490"/>
+            <a:ext cx="5470855" cy="2735428"/>
           </a:xfrm>
           <a:prstGeom prst="rect">
             <a:avLst/>
@@ -15739,8 +15598,8 @@
         </p:nvSpPr>
         <p:spPr>
           <a:xfrm>
-            <a:off x="5349240" y="6089904"/>
-            <a:ext cx="6659575" cy="347472"/>
+            <a:off x="6537960" y="6089904"/>
+            <a:ext cx="5470855" cy="347472"/>
           </a:xfrm>
           <a:prstGeom prst="rect">
             <a:avLst/>
@@ -15764,7 +15623,7 @@
                 <a:ea typeface="Times New Roman" pitchFamily="34" charset="-122"/>
                 <a:cs typeface="Times New Roman" pitchFamily="34" charset="-120"/>
               </a:rPr>
-              <a:t>Illustration: Harmattan haze</a:t>
+              <a:t>Illustration: ocean currents</a:t>
             </a:r>
             <a:endParaRPr lang="en-US" sz="1600" dirty="0"/>
           </a:p>
@@ -15882,9 +15741,129 @@
           </a:p>
         </p:txBody>
       </p:sp>
+      <p:sp>
+        <p:nvSpPr>
+          <p:cNvPr id="3" name="Text 1"/>
+          <p:cNvSpPr/>
+          <p:nvPr/>
+        </p:nvSpPr>
+        <p:spPr>
+          <a:xfrm>
+            <a:off x="365760" y="1005840"/>
+            <a:ext cx="11460175" cy="731520"/>
+          </a:xfrm>
+          <a:prstGeom prst="rect">
+            <a:avLst/>
+          </a:prstGeom>
+          <a:noFill/>
+          <a:ln/>
+        </p:spPr>
+        <p:txBody>
+          <a:bodyPr wrap="square" lIns="0" tIns="0" rIns="0" bIns="0" rtlCol="0" anchor="ctr">
+            <a:normAutofit/>
+          </a:bodyPr>
+          <a:lstStyle/>
+          <a:p>
+            <a:pPr algn="ctr" indent="0" marL="0">
+              <a:buNone/>
+            </a:pPr>
+            <a:r>
+              <a:rPr lang="en-US" sz="3600" b="1" dirty="0">
+                <a:solidFill>
+                  <a:srgbClr val="990011"/>
+                </a:solidFill>
+                <a:latin typeface="Times New Roman" pitchFamily="34" charset="0"/>
+                <a:ea typeface="Times New Roman" pitchFamily="34" charset="-122"/>
+                <a:cs typeface="Times New Roman" pitchFamily="34" charset="-120"/>
+              </a:rPr>
+              <a:t>2. Vertical Heat Transfer</a:t>
+            </a:r>
+            <a:endParaRPr lang="en-US" sz="3600" dirty="0"/>
+          </a:p>
+        </p:txBody>
+      </p:sp>
+      <p:sp>
+        <p:nvSpPr>
+          <p:cNvPr id="4" name="Text 2"/>
+          <p:cNvSpPr/>
+          <p:nvPr/>
+        </p:nvSpPr>
+        <p:spPr>
+          <a:xfrm>
+            <a:off x="365760" y="1783080"/>
+            <a:ext cx="6035040" cy="4617720"/>
+          </a:xfrm>
+          <a:prstGeom prst="rect">
+            <a:avLst/>
+          </a:prstGeom>
+          <a:noFill/>
+          <a:ln/>
+        </p:spPr>
+        <p:txBody>
+          <a:bodyPr wrap="square" lIns="0" tIns="0" rIns="0" bIns="0" rtlCol="0" anchor="t"/>
+          <a:lstStyle/>
+          <a:p>
+            <a:pPr algn="l" indent="0" marL="0">
+              <a:spcAft>
+                <a:spcPts val="800"/>
+              </a:spcAft>
+              <a:buNone/>
+            </a:pPr>
+            <a:r>
+              <a:rPr lang="en-US" sz="2800" i="1" dirty="0">
+                <a:solidFill>
+                  <a:srgbClr val="111111"/>
+                </a:solidFill>
+                <a:latin typeface="Times New Roman" pitchFamily="34" charset="0"/>
+                <a:ea typeface="Times New Roman" pitchFamily="34" charset="-122"/>
+                <a:cs typeface="Times New Roman" pitchFamily="34" charset="-120"/>
+              </a:rPr>
+              <a:t>The lower atmosphere obtains and keeps its heat in the following ways:</a:t>
+            </a:r>
+            <a:endParaRPr lang="en-US" sz="2800" dirty="0"/>
+          </a:p>
+          <a:p>
+            <a:pPr algn="l" indent="0" marL="0">
+              <a:spcAft>
+                <a:spcPts val="800"/>
+              </a:spcAft>
+              <a:buNone/>
+            </a:pPr>
+            <a:r>
+              <a:rPr lang="en-US" sz="2800" b="1" dirty="0">
+                <a:solidFill>
+                  <a:srgbClr val="111111"/>
+                </a:solidFill>
+                <a:latin typeface="Times New Roman" pitchFamily="34" charset="0"/>
+                <a:ea typeface="Times New Roman" pitchFamily="34" charset="-122"/>
+                <a:cs typeface="Times New Roman" pitchFamily="34" charset="-120"/>
+              </a:rPr>
+              <a:t>Absorption of radiation: </a:t>
+            </a:r>
+            <a:pPr algn="l" indent="0" marL="0">
+              <a:spcAft>
+                <a:spcPts val="800"/>
+              </a:spcAft>
+              <a:buNone/>
+            </a:pPr>
+            <a:r>
+              <a:rPr lang="en-US" sz="2800" dirty="0">
+                <a:solidFill>
+                  <a:srgbClr val="111111"/>
+                </a:solidFill>
+                <a:latin typeface="Times New Roman" pitchFamily="34" charset="0"/>
+                <a:ea typeface="Times New Roman" pitchFamily="34" charset="-122"/>
+                <a:cs typeface="Times New Roman" pitchFamily="34" charset="-120"/>
+              </a:rPr>
+              <a:t>Solar radiation crosses the air and heats the ground, which then gives off long-wave terrestrial radiation. Water vapour and carbon dioxide absorb this radiation, so the atmosphere is heated mainly from below.</a:t>
+            </a:r>
+            <a:endParaRPr lang="en-US" sz="2800" dirty="0"/>
+          </a:p>
+        </p:txBody>
+      </p:sp>
       <p:pic>
         <p:nvPicPr>
-          <p:cNvPr id="3" name="Image 0" descr="/home/claude/f4/img/minesec_sheet.png">    </p:cNvPr>
+          <p:cNvPr id="5" name="Image 0" descr="/home/claude/f4/img/v2/heated_below_big.png">    </p:cNvPr>
           <p:cNvPicPr>
             <a:picLocks noChangeAspect="1"/>
           </p:cNvPicPr>
@@ -15898,8 +15877,8 @@
         </p:blipFill>
         <p:spPr>
           <a:xfrm>
-            <a:off x="0" y="658368"/>
-            <a:ext cx="5120640" cy="5833872"/>
+            <a:off x="6537960" y="2849678"/>
+            <a:ext cx="5470855" cy="2137053"/>
           </a:xfrm>
           <a:prstGeom prst="rect">
             <a:avLst/>
@@ -15908,14 +15887,14 @@
       </p:pic>
       <p:sp>
         <p:nvSpPr>
-          <p:cNvPr id="4" name="Text 1"/>
+          <p:cNvPr id="6" name="Text 3"/>
           <p:cNvSpPr/>
           <p:nvPr/>
         </p:nvSpPr>
         <p:spPr>
           <a:xfrm>
-            <a:off x="5349240" y="1005840"/>
-            <a:ext cx="6522415" cy="731520"/>
+            <a:off x="6537960" y="6089904"/>
+            <a:ext cx="5470855" cy="347472"/>
           </a:xfrm>
           <a:prstGeom prst="rect">
             <a:avLst/>
@@ -15924,85 +15903,24 @@
           <a:ln/>
         </p:spPr>
         <p:txBody>
-          <a:bodyPr wrap="square" lIns="0" tIns="0" rIns="0" bIns="0" rtlCol="0" anchor="ctr">
-            <a:normAutofit/>
-          </a:bodyPr>
+          <a:bodyPr wrap="square" lIns="0" tIns="0" rIns="0" bIns="0" rtlCol="0" anchor="ctr"/>
           <a:lstStyle/>
           <a:p>
             <a:pPr algn="ctr" indent="0" marL="0">
               <a:buNone/>
             </a:pPr>
             <a:r>
-              <a:rPr lang="en-US" sz="3600" b="1" dirty="0">
-                <a:solidFill>
-                  <a:srgbClr val="990011"/>
+              <a:rPr lang="en-US" sz="1600" i="1" dirty="0">
+                <a:solidFill>
+                  <a:srgbClr val="555555"/>
                 </a:solidFill>
                 <a:latin typeface="Times New Roman" pitchFamily="34" charset="0"/>
                 <a:ea typeface="Times New Roman" pitchFamily="34" charset="-122"/>
                 <a:cs typeface="Times New Roman" pitchFamily="34" charset="-120"/>
               </a:rPr>
-              <a:t>1. Horizontal Heat Transfer</a:t>
-            </a:r>
-            <a:endParaRPr lang="en-US" sz="3600" dirty="0"/>
-          </a:p>
-        </p:txBody>
-      </p:sp>
-      <p:sp>
-        <p:nvSpPr>
-          <p:cNvPr id="5" name="Text 2"/>
-          <p:cNvSpPr/>
-          <p:nvPr/>
-        </p:nvSpPr>
-        <p:spPr>
-          <a:xfrm>
-            <a:off x="5349240" y="1783080"/>
-            <a:ext cx="6522415" cy="4663440"/>
-          </a:xfrm>
-          <a:prstGeom prst="rect">
-            <a:avLst/>
-          </a:prstGeom>
-          <a:noFill/>
-          <a:ln/>
-        </p:spPr>
-        <p:txBody>
-          <a:bodyPr wrap="square" lIns="0" tIns="0" rIns="0" bIns="0" rtlCol="0" anchor="t"/>
-          <a:lstStyle/>
-          <a:p>
-            <a:pPr algn="l" indent="0" marL="0">
-              <a:spcAft>
-                <a:spcPts val="800"/>
-              </a:spcAft>
-              <a:buNone/>
-            </a:pPr>
-            <a:r>
-              <a:rPr lang="en-US" sz="4000" b="1" dirty="0">
-                <a:solidFill>
-                  <a:srgbClr val="111111"/>
-                </a:solidFill>
-                <a:latin typeface="Times New Roman" pitchFamily="34" charset="0"/>
-                <a:ea typeface="Times New Roman" pitchFamily="34" charset="-122"/>
-                <a:cs typeface="Times New Roman" pitchFamily="34" charset="-120"/>
-              </a:rPr>
-              <a:t>Ocean currents: </a:t>
-            </a:r>
-            <a:pPr algn="l" indent="0" marL="0">
-              <a:spcAft>
-                <a:spcPts val="800"/>
-              </a:spcAft>
-              <a:buNone/>
-            </a:pPr>
-            <a:r>
-              <a:rPr lang="en-US" sz="4000" dirty="0">
-                <a:solidFill>
-                  <a:srgbClr val="111111"/>
-                </a:solidFill>
-                <a:latin typeface="Times New Roman" pitchFamily="34" charset="0"/>
-                <a:ea typeface="Times New Roman" pitchFamily="34" charset="-122"/>
-                <a:cs typeface="Times New Roman" pitchFamily="34" charset="-120"/>
-              </a:rPr>
-              <a:t>They carry warm water poleward and cold water towards the Equator.</a:t>
-            </a:r>
-            <a:endParaRPr lang="en-US" sz="4000" dirty="0"/>
+              <a:t>Illustration: the air heated from below</a:t>
+            </a:r>
+            <a:endParaRPr lang="en-US" sz="1600" dirty="0"/>
           </a:p>
         </p:txBody>
       </p:sp>
@@ -16118,109 +16036,9 @@
           </a:p>
         </p:txBody>
       </p:sp>
-      <p:sp>
-        <p:nvSpPr>
-          <p:cNvPr id="3" name="Text 1"/>
-          <p:cNvSpPr/>
-          <p:nvPr/>
-        </p:nvSpPr>
-        <p:spPr>
-          <a:xfrm>
-            <a:off x="365760" y="1005840"/>
-            <a:ext cx="11460175" cy="731520"/>
-          </a:xfrm>
-          <a:prstGeom prst="rect">
-            <a:avLst/>
-          </a:prstGeom>
-          <a:noFill/>
-          <a:ln/>
-        </p:spPr>
-        <p:txBody>
-          <a:bodyPr wrap="square" lIns="0" tIns="0" rIns="0" bIns="0" rtlCol="0" anchor="ctr">
-            <a:normAutofit/>
-          </a:bodyPr>
-          <a:lstStyle/>
-          <a:p>
-            <a:pPr algn="ctr" indent="0" marL="0">
-              <a:buNone/>
-            </a:pPr>
-            <a:r>
-              <a:rPr lang="en-US" sz="3600" b="1" dirty="0">
-                <a:solidFill>
-                  <a:srgbClr val="990011"/>
-                </a:solidFill>
-                <a:latin typeface="Times New Roman" pitchFamily="34" charset="0"/>
-                <a:ea typeface="Times New Roman" pitchFamily="34" charset="-122"/>
-                <a:cs typeface="Times New Roman" pitchFamily="34" charset="-120"/>
-              </a:rPr>
-              <a:t>1. Horizontal Heat Transfer</a:t>
-            </a:r>
-            <a:endParaRPr lang="en-US" sz="3600" dirty="0"/>
-          </a:p>
-        </p:txBody>
-      </p:sp>
-      <p:sp>
-        <p:nvSpPr>
-          <p:cNvPr id="4" name="Text 2"/>
-          <p:cNvSpPr/>
-          <p:nvPr/>
-        </p:nvSpPr>
-        <p:spPr>
-          <a:xfrm>
-            <a:off x="365760" y="1783080"/>
-            <a:ext cx="4846320" cy="4617720"/>
-          </a:xfrm>
-          <a:prstGeom prst="rect">
-            <a:avLst/>
-          </a:prstGeom>
-          <a:noFill/>
-          <a:ln/>
-        </p:spPr>
-        <p:txBody>
-          <a:bodyPr wrap="square" lIns="0" tIns="0" rIns="0" bIns="0" rtlCol="0" anchor="t"/>
-          <a:lstStyle/>
-          <a:p>
-            <a:pPr algn="l" indent="0" marL="0">
-              <a:spcAft>
-                <a:spcPts val="800"/>
-              </a:spcAft>
-              <a:buNone/>
-            </a:pPr>
-            <a:r>
-              <a:rPr lang="en-US" sz="3600" b="1" dirty="0">
-                <a:solidFill>
-                  <a:srgbClr val="111111"/>
-                </a:solidFill>
-                <a:latin typeface="Times New Roman" pitchFamily="34" charset="0"/>
-                <a:ea typeface="Times New Roman" pitchFamily="34" charset="-122"/>
-                <a:cs typeface="Times New Roman" pitchFamily="34" charset="-120"/>
-              </a:rPr>
-              <a:t>Example: </a:t>
-            </a:r>
-            <a:pPr algn="l" indent="0" marL="0">
-              <a:spcAft>
-                <a:spcPts val="800"/>
-              </a:spcAft>
-              <a:buNone/>
-            </a:pPr>
-            <a:r>
-              <a:rPr lang="en-US" sz="3600" dirty="0">
-                <a:solidFill>
-                  <a:srgbClr val="111111"/>
-                </a:solidFill>
-                <a:latin typeface="Times New Roman" pitchFamily="34" charset="0"/>
-                <a:ea typeface="Times New Roman" pitchFamily="34" charset="-122"/>
-                <a:cs typeface="Times New Roman" pitchFamily="34" charset="-120"/>
-              </a:rPr>
-              <a:t>The warm Guinea Current keeps the coast of Cameroon warm and humid.</a:t>
-            </a:r>
-            <a:endParaRPr lang="en-US" sz="3600" dirty="0"/>
-          </a:p>
-        </p:txBody>
-      </p:sp>
       <p:pic>
         <p:nvPicPr>
-          <p:cNvPr id="5" name="Image 0" descr="/home/claude/f4/img/v2/ocean_currents_big.png">    </p:cNvPr>
+          <p:cNvPr id="3" name="Image 0" descr="/home/claude/f4/img/minesec_sheet.png">    </p:cNvPr>
           <p:cNvPicPr>
             <a:picLocks noChangeAspect="1"/>
           </p:cNvPicPr>
@@ -16234,8 +16052,8 @@
         </p:blipFill>
         <p:spPr>
           <a:xfrm>
-            <a:off x="5349240" y="2253310"/>
-            <a:ext cx="6659575" cy="3329788"/>
+            <a:off x="0" y="658368"/>
+            <a:ext cx="5120640" cy="5833872"/>
           </a:xfrm>
           <a:prstGeom prst="rect">
             <a:avLst/>
@@ -16244,14 +16062,14 @@
       </p:pic>
       <p:sp>
         <p:nvSpPr>
-          <p:cNvPr id="6" name="Text 3"/>
+          <p:cNvPr id="4" name="Text 1"/>
           <p:cNvSpPr/>
           <p:nvPr/>
         </p:nvSpPr>
         <p:spPr>
           <a:xfrm>
-            <a:off x="5349240" y="6089904"/>
-            <a:ext cx="6659575" cy="347472"/>
+            <a:off x="5349240" y="1005840"/>
+            <a:ext cx="6522415" cy="731520"/>
           </a:xfrm>
           <a:prstGeom prst="rect">
             <a:avLst/>
@@ -16260,24 +16078,85 @@
           <a:ln/>
         </p:spPr>
         <p:txBody>
-          <a:bodyPr wrap="square" lIns="0" tIns="0" rIns="0" bIns="0" rtlCol="0" anchor="ctr"/>
+          <a:bodyPr wrap="square" lIns="0" tIns="0" rIns="0" bIns="0" rtlCol="0" anchor="ctr">
+            <a:normAutofit/>
+          </a:bodyPr>
           <a:lstStyle/>
           <a:p>
             <a:pPr algn="ctr" indent="0" marL="0">
               <a:buNone/>
             </a:pPr>
             <a:r>
-              <a:rPr lang="en-US" sz="1600" i="1" dirty="0">
-                <a:solidFill>
-                  <a:srgbClr val="555555"/>
+              <a:rPr lang="en-US" sz="3600" b="1" dirty="0">
+                <a:solidFill>
+                  <a:srgbClr val="990011"/>
                 </a:solidFill>
                 <a:latin typeface="Times New Roman" pitchFamily="34" charset="0"/>
                 <a:ea typeface="Times New Roman" pitchFamily="34" charset="-122"/>
                 <a:cs typeface="Times New Roman" pitchFamily="34" charset="-120"/>
               </a:rPr>
-              <a:t>Illustration: ocean currents</a:t>
-            </a:r>
-            <a:endParaRPr lang="en-US" sz="1600" dirty="0"/>
+              <a:t>2. Vertical Heat Transfer</a:t>
+            </a:r>
+            <a:endParaRPr lang="en-US" sz="3600" dirty="0"/>
+          </a:p>
+        </p:txBody>
+      </p:sp>
+      <p:sp>
+        <p:nvSpPr>
+          <p:cNvPr id="5" name="Text 2"/>
+          <p:cNvSpPr/>
+          <p:nvPr/>
+        </p:nvSpPr>
+        <p:spPr>
+          <a:xfrm>
+            <a:off x="5349240" y="1783080"/>
+            <a:ext cx="6522415" cy="4663440"/>
+          </a:xfrm>
+          <a:prstGeom prst="rect">
+            <a:avLst/>
+          </a:prstGeom>
+          <a:noFill/>
+          <a:ln/>
+        </p:spPr>
+        <p:txBody>
+          <a:bodyPr wrap="square" lIns="0" tIns="0" rIns="0" bIns="0" rtlCol="0" anchor="t"/>
+          <a:lstStyle/>
+          <a:p>
+            <a:pPr algn="l" indent="0" marL="0">
+              <a:spcAft>
+                <a:spcPts val="800"/>
+              </a:spcAft>
+              <a:buNone/>
+            </a:pPr>
+            <a:r>
+              <a:rPr lang="en-US" sz="4000" b="1" dirty="0">
+                <a:solidFill>
+                  <a:srgbClr val="111111"/>
+                </a:solidFill>
+                <a:latin typeface="Times New Roman" pitchFamily="34" charset="0"/>
+                <a:ea typeface="Times New Roman" pitchFamily="34" charset="-122"/>
+                <a:cs typeface="Times New Roman" pitchFamily="34" charset="-120"/>
+              </a:rPr>
+              <a:t>Conduction: </a:t>
+            </a:r>
+            <a:pPr algn="l" indent="0" marL="0">
+              <a:spcAft>
+                <a:spcPts val="800"/>
+              </a:spcAft>
+              <a:buNone/>
+            </a:pPr>
+            <a:r>
+              <a:rPr lang="en-US" sz="4000" dirty="0">
+                <a:solidFill>
+                  <a:srgbClr val="111111"/>
+                </a:solidFill>
+                <a:latin typeface="Times New Roman" pitchFamily="34" charset="0"/>
+                <a:ea typeface="Times New Roman" pitchFamily="34" charset="-122"/>
+                <a:cs typeface="Times New Roman" pitchFamily="34" charset="-120"/>
+              </a:rPr>
+              <a:t>The hot ground heats the thin layer of air in direct contact with it. Since air is a poor conductor, this process only heats the first few centimetres.</a:t>
+            </a:r>
+            <a:endParaRPr lang="en-US" sz="4000" dirty="0"/>
           </a:p>
         </p:txBody>
       </p:sp>
@@ -16443,7 +16322,7 @@
         <p:spPr>
           <a:xfrm>
             <a:off x="365760" y="1783080"/>
-            <a:ext cx="4846320" cy="4617720"/>
+            <a:ext cx="6035040" cy="4617720"/>
           </a:xfrm>
           <a:prstGeom prst="rect">
             <a:avLst/>
@@ -16462,7 +16341,7 @@
               <a:buNone/>
             </a:pPr>
             <a:r>
-              <a:rPr lang="en-US" sz="3200" i="1" dirty="0">
+              <a:rPr lang="en-US" sz="3600" b="1" dirty="0">
                 <a:solidFill>
                   <a:srgbClr val="111111"/>
                 </a:solidFill>
@@ -16470,11 +16349,8 @@
                 <a:ea typeface="Times New Roman" pitchFamily="34" charset="-122"/>
                 <a:cs typeface="Times New Roman" pitchFamily="34" charset="-120"/>
               </a:rPr>
-              <a:t>Heat is transferred vertically in the following ways:</a:t>
-            </a:r>
-            <a:endParaRPr lang="en-US" sz="3200" dirty="0"/>
-          </a:p>
-          <a:p>
+              <a:t>Convection: </a:t>
+            </a:r>
             <a:pPr algn="l" indent="0" marL="0">
               <a:spcAft>
                 <a:spcPts val="800"/>
@@ -16482,7 +16358,7 @@
               <a:buNone/>
             </a:pPr>
             <a:r>
-              <a:rPr lang="en-US" sz="3200" b="1" dirty="0">
+              <a:rPr lang="en-US" sz="3600" dirty="0">
                 <a:solidFill>
                   <a:srgbClr val="111111"/>
                 </a:solidFill>
@@ -16490,32 +16366,15 @@
                 <a:ea typeface="Times New Roman" pitchFamily="34" charset="-122"/>
                 <a:cs typeface="Times New Roman" pitchFamily="34" charset="-120"/>
               </a:rPr>
-              <a:t>Heated from below: </a:t>
-            </a:r>
-            <a:pPr algn="l" indent="0" marL="0">
-              <a:spcAft>
-                <a:spcPts val="800"/>
-              </a:spcAft>
-              <a:buNone/>
-            </a:pPr>
-            <a:r>
-              <a:rPr lang="en-US" sz="3200" dirty="0">
-                <a:solidFill>
-                  <a:srgbClr val="111111"/>
-                </a:solidFill>
-                <a:latin typeface="Times New Roman" pitchFamily="34" charset="0"/>
-                <a:ea typeface="Times New Roman" pitchFamily="34" charset="-122"/>
-                <a:cs typeface="Times New Roman" pitchFamily="34" charset="-120"/>
-              </a:rPr>
-              <a:t>Sunlight crosses the air and heats the ground, which gives off terrestrial radiation that warms the air.</a:t>
-            </a:r>
-            <a:endParaRPr lang="en-US" sz="3200" dirty="0"/>
+              <a:t>Air heated at the surface becomes light and rises, while cooler, denser air sinks to replace it. These currents carry heat upwards and are the main way the lower atmosphere is heated.</a:t>
+            </a:r>
+            <a:endParaRPr lang="en-US" sz="3600" dirty="0"/>
           </a:p>
         </p:txBody>
       </p:sp>
       <p:pic>
         <p:nvPicPr>
-          <p:cNvPr id="5" name="Image 0" descr="/home/claude/f4/img/v2/heated_below_big.png">    </p:cNvPr>
+          <p:cNvPr id="5" name="Image 0" descr="/home/claude/f4/img/v2/convection_last.png">    </p:cNvPr>
           <p:cNvPicPr>
             <a:picLocks noChangeAspect="1"/>
           </p:cNvPicPr>
@@ -16529,8 +16388,8 @@
         </p:blipFill>
         <p:spPr>
           <a:xfrm>
-            <a:off x="5349240" y="2617506"/>
-            <a:ext cx="6659575" cy="2601397"/>
+            <a:off x="6537960" y="2849678"/>
+            <a:ext cx="5470855" cy="2137053"/>
           </a:xfrm>
           <a:prstGeom prst="rect">
             <a:avLst/>
@@ -16545,8 +16404,8 @@
         </p:nvSpPr>
         <p:spPr>
           <a:xfrm>
-            <a:off x="5349240" y="6089904"/>
-            <a:ext cx="6659575" cy="347472"/>
+            <a:off x="6537960" y="6089904"/>
+            <a:ext cx="5470855" cy="347472"/>
           </a:xfrm>
           <a:prstGeom prst="rect">
             <a:avLst/>
@@ -16570,7 +16429,7 @@
                 <a:ea typeface="Times New Roman" pitchFamily="34" charset="-122"/>
                 <a:cs typeface="Times New Roman" pitchFamily="34" charset="-120"/>
               </a:rPr>
-              <a:t>Illustration: the atmosphere is heated from below</a:t>
+              <a:t>Illustration: convection currents</a:t>
             </a:r>
             <a:endParaRPr lang="en-US" sz="1600" dirty="0"/>
           </a:p>
@@ -16688,9 +16547,109 @@
           </a:p>
         </p:txBody>
       </p:sp>
+      <p:sp>
+        <p:nvSpPr>
+          <p:cNvPr id="3" name="Text 1"/>
+          <p:cNvSpPr/>
+          <p:nvPr/>
+        </p:nvSpPr>
+        <p:spPr>
+          <a:xfrm>
+            <a:off x="365760" y="1005840"/>
+            <a:ext cx="11460175" cy="731520"/>
+          </a:xfrm>
+          <a:prstGeom prst="rect">
+            <a:avLst/>
+          </a:prstGeom>
+          <a:noFill/>
+          <a:ln/>
+        </p:spPr>
+        <p:txBody>
+          <a:bodyPr wrap="square" lIns="0" tIns="0" rIns="0" bIns="0" rtlCol="0" anchor="ctr">
+            <a:normAutofit/>
+          </a:bodyPr>
+          <a:lstStyle/>
+          <a:p>
+            <a:pPr algn="ctr" indent="0" marL="0">
+              <a:buNone/>
+            </a:pPr>
+            <a:r>
+              <a:rPr lang="en-US" sz="3600" b="1" dirty="0">
+                <a:solidFill>
+                  <a:srgbClr val="990011"/>
+                </a:solidFill>
+                <a:latin typeface="Times New Roman" pitchFamily="34" charset="0"/>
+                <a:ea typeface="Times New Roman" pitchFamily="34" charset="-122"/>
+                <a:cs typeface="Times New Roman" pitchFamily="34" charset="-120"/>
+              </a:rPr>
+              <a:t>2. Vertical Heat Transfer</a:t>
+            </a:r>
+            <a:endParaRPr lang="en-US" sz="3600" dirty="0"/>
+          </a:p>
+        </p:txBody>
+      </p:sp>
+      <p:sp>
+        <p:nvSpPr>
+          <p:cNvPr id="4" name="Text 2"/>
+          <p:cNvSpPr/>
+          <p:nvPr/>
+        </p:nvSpPr>
+        <p:spPr>
+          <a:xfrm>
+            <a:off x="365760" y="1783080"/>
+            <a:ext cx="6035040" cy="4617720"/>
+          </a:xfrm>
+          <a:prstGeom prst="rect">
+            <a:avLst/>
+          </a:prstGeom>
+          <a:noFill/>
+          <a:ln/>
+        </p:spPr>
+        <p:txBody>
+          <a:bodyPr wrap="square" lIns="0" tIns="0" rIns="0" bIns="0" rtlCol="0" anchor="t"/>
+          <a:lstStyle/>
+          <a:p>
+            <a:pPr algn="l" indent="0" marL="0">
+              <a:spcAft>
+                <a:spcPts val="800"/>
+              </a:spcAft>
+              <a:buNone/>
+            </a:pPr>
+            <a:r>
+              <a:rPr lang="en-US" sz="3400" b="1" dirty="0">
+                <a:solidFill>
+                  <a:srgbClr val="111111"/>
+                </a:solidFill>
+                <a:latin typeface="Times New Roman" pitchFamily="34" charset="0"/>
+                <a:ea typeface="Times New Roman" pitchFamily="34" charset="-122"/>
+                <a:cs typeface="Times New Roman" pitchFamily="34" charset="-120"/>
+              </a:rPr>
+              <a:t>Latent heat of vaporisation: </a:t>
+            </a:r>
+            <a:pPr algn="l" indent="0" marL="0">
+              <a:spcAft>
+                <a:spcPts val="800"/>
+              </a:spcAft>
+              <a:buNone/>
+            </a:pPr>
+            <a:r>
+              <a:rPr lang="en-US" sz="3400" dirty="0">
+                <a:solidFill>
+                  <a:srgbClr val="111111"/>
+                </a:solidFill>
+                <a:latin typeface="Times New Roman" pitchFamily="34" charset="0"/>
+                <a:ea typeface="Times New Roman" pitchFamily="34" charset="-122"/>
+                <a:cs typeface="Times New Roman" pitchFamily="34" charset="-120"/>
+              </a:rPr>
+              <a:t>When water evaporates from the Benue, Lake Lagdo and plants, it takes heat and stores it in the vapour. This heat is released high up when the vapour condenses into clouds, and it warms the upper air.</a:t>
+            </a:r>
+            <a:endParaRPr lang="en-US" sz="3400" dirty="0"/>
+          </a:p>
+        </p:txBody>
+      </p:sp>
       <p:pic>
         <p:nvPicPr>
-          <p:cNvPr id="3" name="Image 0" descr="/home/claude/f4/img/minesec_sheet.png">    </p:cNvPr>
+          <p:cNvPr id="5" name="Image 0" descr="/home/claude/f4/img/v2/lsa_steam.jpg">    </p:cNvPr>
           <p:cNvPicPr>
             <a:picLocks noChangeAspect="1"/>
           </p:cNvPicPr>
@@ -16704,8 +16663,8 @@
         </p:blipFill>
         <p:spPr>
           <a:xfrm>
-            <a:off x="0" y="658368"/>
-            <a:ext cx="5120640" cy="5833872"/>
+            <a:off x="6537960" y="2400897"/>
+            <a:ext cx="5470855" cy="3034615"/>
           </a:xfrm>
           <a:prstGeom prst="rect">
             <a:avLst/>
@@ -16714,14 +16673,14 @@
       </p:pic>
       <p:sp>
         <p:nvSpPr>
-          <p:cNvPr id="4" name="Text 1"/>
+          <p:cNvPr id="6" name="Text 3"/>
           <p:cNvSpPr/>
           <p:nvPr/>
         </p:nvSpPr>
         <p:spPr>
           <a:xfrm>
-            <a:off x="5349240" y="1005840"/>
-            <a:ext cx="6522415" cy="731520"/>
+            <a:off x="6537960" y="6089904"/>
+            <a:ext cx="5470855" cy="347472"/>
           </a:xfrm>
           <a:prstGeom prst="rect">
             <a:avLst/>
@@ -16730,85 +16689,24 @@
           <a:ln/>
         </p:spPr>
         <p:txBody>
-          <a:bodyPr wrap="square" lIns="0" tIns="0" rIns="0" bIns="0" rtlCol="0" anchor="ctr">
-            <a:normAutofit/>
-          </a:bodyPr>
+          <a:bodyPr wrap="square" lIns="0" tIns="0" rIns="0" bIns="0" rtlCol="0" anchor="ctr"/>
           <a:lstStyle/>
           <a:p>
             <a:pPr algn="ctr" indent="0" marL="0">
               <a:buNone/>
             </a:pPr>
             <a:r>
-              <a:rPr lang="en-US" sz="3600" b="1" dirty="0">
-                <a:solidFill>
-                  <a:srgbClr val="990011"/>
+              <a:rPr lang="en-US" sz="1600" i="1" dirty="0">
+                <a:solidFill>
+                  <a:srgbClr val="555555"/>
                 </a:solidFill>
                 <a:latin typeface="Times New Roman" pitchFamily="34" charset="0"/>
                 <a:ea typeface="Times New Roman" pitchFamily="34" charset="-122"/>
                 <a:cs typeface="Times New Roman" pitchFamily="34" charset="-120"/>
               </a:rPr>
-              <a:t>2. Vertical Heat Transfer</a:t>
-            </a:r>
-            <a:endParaRPr lang="en-US" sz="3600" dirty="0"/>
-          </a:p>
-        </p:txBody>
-      </p:sp>
-      <p:sp>
-        <p:nvSpPr>
-          <p:cNvPr id="5" name="Text 2"/>
-          <p:cNvSpPr/>
-          <p:nvPr/>
-        </p:nvSpPr>
-        <p:spPr>
-          <a:xfrm>
-            <a:off x="5349240" y="1783080"/>
-            <a:ext cx="6522415" cy="4663440"/>
-          </a:xfrm>
-          <a:prstGeom prst="rect">
-            <a:avLst/>
-          </a:prstGeom>
-          <a:noFill/>
-          <a:ln/>
-        </p:spPr>
-        <p:txBody>
-          <a:bodyPr wrap="square" lIns="0" tIns="0" rIns="0" bIns="0" rtlCol="0" anchor="t"/>
-          <a:lstStyle/>
-          <a:p>
-            <a:pPr algn="l" indent="0" marL="0">
-              <a:spcAft>
-                <a:spcPts val="800"/>
-              </a:spcAft>
-              <a:buNone/>
-            </a:pPr>
-            <a:r>
-              <a:rPr lang="en-US" sz="4000" b="1" dirty="0">
-                <a:solidFill>
-                  <a:srgbClr val="111111"/>
-                </a:solidFill>
-                <a:latin typeface="Times New Roman" pitchFamily="34" charset="0"/>
-                <a:ea typeface="Times New Roman" pitchFamily="34" charset="-122"/>
-                <a:cs typeface="Times New Roman" pitchFamily="34" charset="-120"/>
-              </a:rPr>
-              <a:t>Conduction: </a:t>
-            </a:r>
-            <a:pPr algn="l" indent="0" marL="0">
-              <a:spcAft>
-                <a:spcPts val="800"/>
-              </a:spcAft>
-              <a:buNone/>
-            </a:pPr>
-            <a:r>
-              <a:rPr lang="en-US" sz="4000" dirty="0">
-                <a:solidFill>
-                  <a:srgbClr val="111111"/>
-                </a:solidFill>
-                <a:latin typeface="Times New Roman" pitchFamily="34" charset="0"/>
-                <a:ea typeface="Times New Roman" pitchFamily="34" charset="-122"/>
-                <a:cs typeface="Times New Roman" pitchFamily="34" charset="-120"/>
-              </a:rPr>
-              <a:t>The ground heats the air touching it, but only the first few centimetres.</a:t>
-            </a:r>
-            <a:endParaRPr lang="en-US" sz="4000" dirty="0"/>
+              <a:t>Illustration: evaporation</a:t>
+            </a:r>
+            <a:endParaRPr lang="en-US" sz="1600" dirty="0"/>
           </a:p>
         </p:txBody>
       </p:sp>
@@ -16918,115 +16816,15 @@
                 <a:ea typeface="Calibri" pitchFamily="34" charset="-122"/>
                 <a:cs typeface="Calibri" pitchFamily="34" charset="-120"/>
               </a:rPr>
-              <a:t>BOARD SUMMARY</a:t>
+              <a:t>FORMATIVE EVALUATION</a:t>
             </a:r>
             <a:endParaRPr lang="en-US" sz="1400" dirty="0"/>
-          </a:p>
-        </p:txBody>
-      </p:sp>
-      <p:sp>
-        <p:nvSpPr>
-          <p:cNvPr id="3" name="Text 1"/>
-          <p:cNvSpPr/>
-          <p:nvPr/>
-        </p:nvSpPr>
-        <p:spPr>
-          <a:xfrm>
-            <a:off x="365760" y="1005840"/>
-            <a:ext cx="11460175" cy="731520"/>
-          </a:xfrm>
-          <a:prstGeom prst="rect">
-            <a:avLst/>
-          </a:prstGeom>
-          <a:noFill/>
-          <a:ln/>
-        </p:spPr>
-        <p:txBody>
-          <a:bodyPr wrap="square" lIns="0" tIns="0" rIns="0" bIns="0" rtlCol="0" anchor="ctr">
-            <a:normAutofit/>
-          </a:bodyPr>
-          <a:lstStyle/>
-          <a:p>
-            <a:pPr algn="ctr" indent="0" marL="0">
-              <a:buNone/>
-            </a:pPr>
-            <a:r>
-              <a:rPr lang="en-US" sz="3600" b="1" dirty="0">
-                <a:solidFill>
-                  <a:srgbClr val="990011"/>
-                </a:solidFill>
-                <a:latin typeface="Times New Roman" pitchFamily="34" charset="0"/>
-                <a:ea typeface="Times New Roman" pitchFamily="34" charset="-122"/>
-                <a:cs typeface="Times New Roman" pitchFamily="34" charset="-120"/>
-              </a:rPr>
-              <a:t>2. Vertical Heat Transfer</a:t>
-            </a:r>
-            <a:endParaRPr lang="en-US" sz="3600" dirty="0"/>
-          </a:p>
-        </p:txBody>
-      </p:sp>
-      <p:sp>
-        <p:nvSpPr>
-          <p:cNvPr id="4" name="Text 2"/>
-          <p:cNvSpPr/>
-          <p:nvPr/>
-        </p:nvSpPr>
-        <p:spPr>
-          <a:xfrm>
-            <a:off x="365760" y="1783080"/>
-            <a:ext cx="4846320" cy="4617720"/>
-          </a:xfrm>
-          <a:prstGeom prst="rect">
-            <a:avLst/>
-          </a:prstGeom>
-          <a:noFill/>
-          <a:ln/>
-        </p:spPr>
-        <p:txBody>
-          <a:bodyPr wrap="square" lIns="0" tIns="0" rIns="0" bIns="0" rtlCol="0" anchor="t"/>
-          <a:lstStyle/>
-          <a:p>
-            <a:pPr algn="l" indent="0" marL="0">
-              <a:spcAft>
-                <a:spcPts val="800"/>
-              </a:spcAft>
-              <a:buNone/>
-            </a:pPr>
-            <a:r>
-              <a:rPr lang="en-US" sz="3600" b="1" dirty="0">
-                <a:solidFill>
-                  <a:srgbClr val="111111"/>
-                </a:solidFill>
-                <a:latin typeface="Times New Roman" pitchFamily="34" charset="0"/>
-                <a:ea typeface="Times New Roman" pitchFamily="34" charset="-122"/>
-                <a:cs typeface="Times New Roman" pitchFamily="34" charset="-120"/>
-              </a:rPr>
-              <a:t>Convection: </a:t>
-            </a:r>
-            <a:pPr algn="l" indent="0" marL="0">
-              <a:spcAft>
-                <a:spcPts val="800"/>
-              </a:spcAft>
-              <a:buNone/>
-            </a:pPr>
-            <a:r>
-              <a:rPr lang="en-US" sz="3600" dirty="0">
-                <a:solidFill>
-                  <a:srgbClr val="111111"/>
-                </a:solidFill>
-                <a:latin typeface="Times New Roman" pitchFamily="34" charset="0"/>
-                <a:ea typeface="Times New Roman" pitchFamily="34" charset="-122"/>
-                <a:cs typeface="Times New Roman" pitchFamily="34" charset="-120"/>
-              </a:rPr>
-              <a:t>Warm, light air rises and cool, dense air sinks, forming currents that heat the lower atmosphere; it is the most important process.</a:t>
-            </a:r>
-            <a:endParaRPr lang="en-US" sz="3600" dirty="0"/>
           </a:p>
         </p:txBody>
       </p:sp>
       <p:pic>
         <p:nvPicPr>
-          <p:cNvPr id="5" name="Image 0" descr="/home/claude/f4/img/v2/convection_last.png">    </p:cNvPr>
+          <p:cNvPr id="3" name="Image 0" descr="/home/claude/f4/img/minesec_sheet.png">    </p:cNvPr>
           <p:cNvPicPr>
             <a:picLocks noChangeAspect="1"/>
           </p:cNvPicPr>
@@ -17040,8 +16838,8 @@
         </p:blipFill>
         <p:spPr>
           <a:xfrm>
-            <a:off x="5349240" y="2617506"/>
-            <a:ext cx="6659575" cy="2601397"/>
+            <a:off x="0" y="658368"/>
+            <a:ext cx="5120640" cy="5833872"/>
           </a:xfrm>
           <a:prstGeom prst="rect">
             <a:avLst/>
@@ -17050,14 +16848,14 @@
       </p:pic>
       <p:sp>
         <p:nvSpPr>
-          <p:cNvPr id="6" name="Text 3"/>
+          <p:cNvPr id="4" name="Text 1"/>
           <p:cNvSpPr/>
           <p:nvPr/>
         </p:nvSpPr>
         <p:spPr>
           <a:xfrm>
-            <a:off x="5349240" y="6089904"/>
-            <a:ext cx="6659575" cy="347472"/>
+            <a:off x="5349240" y="1005840"/>
+            <a:ext cx="6522415" cy="731520"/>
           </a:xfrm>
           <a:prstGeom prst="rect">
             <a:avLst/>
@@ -17066,24 +16864,68 @@
           <a:ln/>
         </p:spPr>
         <p:txBody>
-          <a:bodyPr wrap="square" lIns="0" tIns="0" rIns="0" bIns="0" rtlCol="0" anchor="ctr"/>
+          <a:bodyPr wrap="square" lIns="0" tIns="0" rIns="0" bIns="0" rtlCol="0" anchor="ctr">
+            <a:normAutofit/>
+          </a:bodyPr>
           <a:lstStyle/>
           <a:p>
             <a:pPr algn="ctr" indent="0" marL="0">
               <a:buNone/>
             </a:pPr>
             <a:r>
-              <a:rPr lang="en-US" sz="1600" i="1" dirty="0">
-                <a:solidFill>
-                  <a:srgbClr val="555555"/>
+              <a:rPr lang="en-US" sz="3600" b="1" dirty="0">
+                <a:solidFill>
+                  <a:srgbClr val="990011"/>
                 </a:solidFill>
                 <a:latin typeface="Times New Roman" pitchFamily="34" charset="0"/>
                 <a:ea typeface="Times New Roman" pitchFamily="34" charset="-122"/>
                 <a:cs typeface="Times New Roman" pitchFamily="34" charset="-120"/>
               </a:rPr>
-              <a:t>Illustration: convection</a:t>
-            </a:r>
-            <a:endParaRPr lang="en-US" sz="1600" dirty="0"/>
+              <a:t>Evaluation 1</a:t>
+            </a:r>
+            <a:endParaRPr lang="en-US" sz="3600" dirty="0"/>
+          </a:p>
+        </p:txBody>
+      </p:sp>
+      <p:sp>
+        <p:nvSpPr>
+          <p:cNvPr id="5" name="Text 2"/>
+          <p:cNvSpPr/>
+          <p:nvPr/>
+        </p:nvSpPr>
+        <p:spPr>
+          <a:xfrm>
+            <a:off x="5349240" y="1783080"/>
+            <a:ext cx="6522415" cy="4663440"/>
+          </a:xfrm>
+          <a:prstGeom prst="rect">
+            <a:avLst/>
+          </a:prstGeom>
+          <a:noFill/>
+          <a:ln/>
+        </p:spPr>
+        <p:txBody>
+          <a:bodyPr wrap="square" lIns="0" tIns="0" rIns="0" bIns="0" rtlCol="0" anchor="t"/>
+          <a:lstStyle/>
+          <a:p>
+            <a:pPr algn="l" indent="0" marL="0">
+              <a:spcAft>
+                <a:spcPts val="800"/>
+              </a:spcAft>
+              <a:buNone/>
+            </a:pPr>
+            <a:r>
+              <a:rPr lang="en-US" sz="4000" dirty="0">
+                <a:solidFill>
+                  <a:srgbClr val="111111"/>
+                </a:solidFill>
+                <a:latin typeface="Times New Roman" pitchFamily="34" charset="0"/>
+                <a:ea typeface="Times New Roman" pitchFamily="34" charset="-122"/>
+                <a:cs typeface="Times New Roman" pitchFamily="34" charset="-120"/>
+              </a:rPr>
+              <a:t>Distinguish advection from convection.</a:t>
+            </a:r>
+            <a:endParaRPr lang="en-US" sz="4000" dirty="0"/>
           </a:p>
         </p:txBody>
       </p:sp>
@@ -17193,115 +17035,15 @@
                 <a:ea typeface="Calibri" pitchFamily="34" charset="-122"/>
                 <a:cs typeface="Calibri" pitchFamily="34" charset="-120"/>
               </a:rPr>
-              <a:t>BOARD SUMMARY</a:t>
+              <a:t>FORMATIVE EVALUATION</a:t>
             </a:r>
             <a:endParaRPr lang="en-US" sz="1400" dirty="0"/>
-          </a:p>
-        </p:txBody>
-      </p:sp>
-      <p:sp>
-        <p:nvSpPr>
-          <p:cNvPr id="3" name="Text 1"/>
-          <p:cNvSpPr/>
-          <p:nvPr/>
-        </p:nvSpPr>
-        <p:spPr>
-          <a:xfrm>
-            <a:off x="365760" y="1005840"/>
-            <a:ext cx="11460175" cy="731520"/>
-          </a:xfrm>
-          <a:prstGeom prst="rect">
-            <a:avLst/>
-          </a:prstGeom>
-          <a:noFill/>
-          <a:ln/>
-        </p:spPr>
-        <p:txBody>
-          <a:bodyPr wrap="square" lIns="0" tIns="0" rIns="0" bIns="0" rtlCol="0" anchor="ctr">
-            <a:normAutofit/>
-          </a:bodyPr>
-          <a:lstStyle/>
-          <a:p>
-            <a:pPr algn="ctr" indent="0" marL="0">
-              <a:buNone/>
-            </a:pPr>
-            <a:r>
-              <a:rPr lang="en-US" sz="3600" b="1" dirty="0">
-                <a:solidFill>
-                  <a:srgbClr val="990011"/>
-                </a:solidFill>
-                <a:latin typeface="Times New Roman" pitchFamily="34" charset="0"/>
-                <a:ea typeface="Times New Roman" pitchFamily="34" charset="-122"/>
-                <a:cs typeface="Times New Roman" pitchFamily="34" charset="-120"/>
-              </a:rPr>
-              <a:t>2. Vertical Heat Transfer</a:t>
-            </a:r>
-            <a:endParaRPr lang="en-US" sz="3600" dirty="0"/>
-          </a:p>
-        </p:txBody>
-      </p:sp>
-      <p:sp>
-        <p:nvSpPr>
-          <p:cNvPr id="4" name="Text 2"/>
-          <p:cNvSpPr/>
-          <p:nvPr/>
-        </p:nvSpPr>
-        <p:spPr>
-          <a:xfrm>
-            <a:off x="365760" y="1783080"/>
-            <a:ext cx="4846320" cy="4617720"/>
-          </a:xfrm>
-          <a:prstGeom prst="rect">
-            <a:avLst/>
-          </a:prstGeom>
-          <a:noFill/>
-          <a:ln/>
-        </p:spPr>
-        <p:txBody>
-          <a:bodyPr wrap="square" lIns="0" tIns="0" rIns="0" bIns="0" rtlCol="0" anchor="t"/>
-          <a:lstStyle/>
-          <a:p>
-            <a:pPr algn="l" indent="0" marL="0">
-              <a:spcAft>
-                <a:spcPts val="800"/>
-              </a:spcAft>
-              <a:buNone/>
-            </a:pPr>
-            <a:r>
-              <a:rPr lang="en-US" sz="3600" b="1" dirty="0">
-                <a:solidFill>
-                  <a:srgbClr val="111111"/>
-                </a:solidFill>
-                <a:latin typeface="Times New Roman" pitchFamily="34" charset="0"/>
-                <a:ea typeface="Times New Roman" pitchFamily="34" charset="-122"/>
-                <a:cs typeface="Times New Roman" pitchFamily="34" charset="-120"/>
-              </a:rPr>
-              <a:t>Latent heat: </a:t>
-            </a:r>
-            <a:pPr algn="l" indent="0" marL="0">
-              <a:spcAft>
-                <a:spcPts val="800"/>
-              </a:spcAft>
-              <a:buNone/>
-            </a:pPr>
-            <a:r>
-              <a:rPr lang="en-US" sz="3600" dirty="0">
-                <a:solidFill>
-                  <a:srgbClr val="111111"/>
-                </a:solidFill>
-                <a:latin typeface="Times New Roman" pitchFamily="34" charset="0"/>
-                <a:ea typeface="Times New Roman" pitchFamily="34" charset="-122"/>
-                <a:cs typeface="Times New Roman" pitchFamily="34" charset="-120"/>
-              </a:rPr>
-              <a:t>Evaporation from the Benue, Lake Lagdo and plants stores heat, which is released high up when clouds form.</a:t>
-            </a:r>
-            <a:endParaRPr lang="en-US" sz="3600" dirty="0"/>
           </a:p>
         </p:txBody>
       </p:sp>
       <p:pic>
         <p:nvPicPr>
-          <p:cNvPr id="5" name="Image 0" descr="/home/claude/f4/img/v2/lsa_steam.jpg">    </p:cNvPr>
+          <p:cNvPr id="3" name="Image 0" descr="/home/claude/f4/img/minesec_sheet.png">    </p:cNvPr>
           <p:cNvPicPr>
             <a:picLocks noChangeAspect="1"/>
           </p:cNvPicPr>
@@ -17315,8 +17057,8 @@
         </p:blipFill>
         <p:spPr>
           <a:xfrm>
-            <a:off x="5349240" y="2071212"/>
-            <a:ext cx="6659575" cy="3693983"/>
+            <a:off x="0" y="658368"/>
+            <a:ext cx="5120640" cy="5833872"/>
           </a:xfrm>
           <a:prstGeom prst="rect">
             <a:avLst/>
@@ -17325,14 +17067,14 @@
       </p:pic>
       <p:sp>
         <p:nvSpPr>
-          <p:cNvPr id="6" name="Text 3"/>
+          <p:cNvPr id="4" name="Text 1"/>
           <p:cNvSpPr/>
           <p:nvPr/>
         </p:nvSpPr>
         <p:spPr>
           <a:xfrm>
-            <a:off x="5349240" y="6089904"/>
-            <a:ext cx="6659575" cy="347472"/>
+            <a:off x="5349240" y="1005840"/>
+            <a:ext cx="6522415" cy="731520"/>
           </a:xfrm>
           <a:prstGeom prst="rect">
             <a:avLst/>
@@ -17341,24 +17083,68 @@
           <a:ln/>
         </p:spPr>
         <p:txBody>
-          <a:bodyPr wrap="square" lIns="0" tIns="0" rIns="0" bIns="0" rtlCol="0" anchor="ctr"/>
+          <a:bodyPr wrap="square" lIns="0" tIns="0" rIns="0" bIns="0" rtlCol="0" anchor="ctr">
+            <a:normAutofit/>
+          </a:bodyPr>
           <a:lstStyle/>
           <a:p>
             <a:pPr algn="ctr" indent="0" marL="0">
               <a:buNone/>
             </a:pPr>
             <a:r>
-              <a:rPr lang="en-US" sz="1600" i="1" dirty="0">
-                <a:solidFill>
-                  <a:srgbClr val="555555"/>
+              <a:rPr lang="en-US" sz="3600" b="1" dirty="0">
+                <a:solidFill>
+                  <a:srgbClr val="990011"/>
                 </a:solidFill>
                 <a:latin typeface="Times New Roman" pitchFamily="34" charset="0"/>
                 <a:ea typeface="Times New Roman" pitchFamily="34" charset="-122"/>
                 <a:cs typeface="Times New Roman" pitchFamily="34" charset="-120"/>
               </a:rPr>
-              <a:t>Illustration: steam rising</a:t>
-            </a:r>
-            <a:endParaRPr lang="en-US" sz="1600" dirty="0"/>
+              <a:t>Expected Answer</a:t>
+            </a:r>
+            <a:endParaRPr lang="en-US" sz="3600" dirty="0"/>
+          </a:p>
+        </p:txBody>
+      </p:sp>
+      <p:sp>
+        <p:nvSpPr>
+          <p:cNvPr id="5" name="Text 2"/>
+          <p:cNvSpPr/>
+          <p:nvPr/>
+        </p:nvSpPr>
+        <p:spPr>
+          <a:xfrm>
+            <a:off x="5349240" y="1783080"/>
+            <a:ext cx="6522415" cy="4663440"/>
+          </a:xfrm>
+          <a:prstGeom prst="rect">
+            <a:avLst/>
+          </a:prstGeom>
+          <a:noFill/>
+          <a:ln/>
+        </p:spPr>
+        <p:txBody>
+          <a:bodyPr wrap="square" lIns="0" tIns="0" rIns="0" bIns="0" rtlCol="0" anchor="t"/>
+          <a:lstStyle/>
+          <a:p>
+            <a:pPr algn="l" indent="0" marL="0">
+              <a:spcAft>
+                <a:spcPts val="800"/>
+              </a:spcAft>
+              <a:buNone/>
+            </a:pPr>
+            <a:r>
+              <a:rPr lang="en-US" sz="4000" dirty="0">
+                <a:solidFill>
+                  <a:srgbClr val="111111"/>
+                </a:solidFill>
+                <a:latin typeface="Times New Roman" pitchFamily="34" charset="0"/>
+                <a:ea typeface="Times New Roman" pitchFamily="34" charset="-122"/>
+                <a:cs typeface="Times New Roman" pitchFamily="34" charset="-120"/>
+              </a:rPr>
+              <a:t>Advection is horizontal transfer of heat by wind; convection is vertical transfer by rising and sinking air.</a:t>
+            </a:r>
+            <a:endParaRPr lang="en-US" sz="4000" dirty="0"/>
           </a:p>
         </p:txBody>
       </p:sp>
@@ -17533,7 +17319,7 @@
                 <a:ea typeface="Times New Roman" pitchFamily="34" charset="-122"/>
                 <a:cs typeface="Times New Roman" pitchFamily="34" charset="-120"/>
               </a:rPr>
-              <a:t>Evaluation 1</a:t>
+              <a:t>Evaluation 2</a:t>
             </a:r>
             <a:endParaRPr lang="en-US" sz="3600" dirty="0"/>
           </a:p>
@@ -17575,7 +17361,7 @@
                 <a:ea typeface="Times New Roman" pitchFamily="34" charset="-122"/>
                 <a:cs typeface="Times New Roman" pitchFamily="34" charset="-120"/>
               </a:rPr>
-              <a:t>Distinguish advection from convection.</a:t>
+              <a:t>Why is the atmosphere said to be heated from below?</a:t>
             </a:r>
             <a:endParaRPr lang="en-US" sz="4000" dirty="0"/>
           </a:p>
@@ -17794,7 +17580,7 @@
                 <a:ea typeface="Times New Roman" pitchFamily="34" charset="-122"/>
                 <a:cs typeface="Times New Roman" pitchFamily="34" charset="-120"/>
               </a:rPr>
-              <a:t>Advection is horizontal transfer of heat by wind; convection is vertical transfer by rising and sinking air.</a:t>
+              <a:t>Sunlight heats the ground first, and the ground then heats the air by radiation, conduction and convection.</a:t>
             </a:r>
             <a:endParaRPr lang="en-US" sz="4000" dirty="0"/>
           </a:p>
@@ -17906,7 +17692,7 @@
                 <a:ea typeface="Calibri" pitchFamily="34" charset="-122"/>
                 <a:cs typeface="Calibri" pitchFamily="34" charset="-120"/>
               </a:rPr>
-              <a:t>FORMATIVE EVALUATION</a:t>
+              <a:t>REMEDIATION</a:t>
             </a:r>
             <a:endParaRPr lang="en-US" sz="1400" dirty="0"/>
           </a:p>
@@ -17929,7 +17715,7 @@
         <p:spPr>
           <a:xfrm>
             <a:off x="0" y="658368"/>
-            <a:ext cx="5120640" cy="5833872"/>
+            <a:ext cx="2468880" cy="5833872"/>
           </a:xfrm>
           <a:prstGeom prst="rect">
             <a:avLst/>
@@ -17944,8 +17730,8 @@
         </p:nvSpPr>
         <p:spPr>
           <a:xfrm>
-            <a:off x="5349240" y="1005840"/>
-            <a:ext cx="6522415" cy="731520"/>
+            <a:off x="2697480" y="1005840"/>
+            <a:ext cx="9174175" cy="731520"/>
           </a:xfrm>
           <a:prstGeom prst="rect">
             <a:avLst/>
@@ -17971,7 +17757,7 @@
                 <a:ea typeface="Times New Roman" pitchFamily="34" charset="-122"/>
                 <a:cs typeface="Times New Roman" pitchFamily="34" charset="-120"/>
               </a:rPr>
-              <a:t>Evaluation 2</a:t>
+              <a:t>Remediation</a:t>
             </a:r>
             <a:endParaRPr lang="en-US" sz="3600" dirty="0"/>
           </a:p>
@@ -17985,8 +17771,8 @@
         </p:nvSpPr>
         <p:spPr>
           <a:xfrm>
-            <a:off x="5349240" y="1783080"/>
-            <a:ext cx="6522415" cy="4663440"/>
+            <a:off x="2697480" y="1783080"/>
+            <a:ext cx="9174175" cy="4663440"/>
           </a:xfrm>
           <a:prstGeom prst="rect">
             <a:avLst/>
@@ -18005,7 +17791,7 @@
               <a:buNone/>
             </a:pPr>
             <a:r>
-              <a:rPr lang="en-US" sz="4000" dirty="0">
+              <a:rPr lang="en-US" sz="4000" b="1" dirty="0">
                 <a:solidFill>
                   <a:srgbClr val="111111"/>
                 </a:solidFill>
@@ -18013,7 +17799,73 @@
                 <a:ea typeface="Times New Roman" pitchFamily="34" charset="-122"/>
                 <a:cs typeface="Times New Roman" pitchFamily="34" charset="-120"/>
               </a:rPr>
-              <a:t>Why is the atmosphere said to be heated from below?</a:t>
+              <a:t>Fill in the blanks:</a:t>
+            </a:r>
+            <a:endParaRPr lang="en-US" sz="4000" dirty="0"/>
+          </a:p>
+          <a:p>
+            <a:pPr algn="l" marL="342900" indent="-342900">
+              <a:spcAft>
+                <a:spcPts val="800"/>
+              </a:spcAft>
+              <a:buSzPct val="100000"/>
+              <a:buFont typeface="+mj-lt"/>
+              <a:buAutoNum type="arabicPeriod" startAt="1"/>
+            </a:pPr>
+            <a:r>
+              <a:rPr lang="en-US" sz="4000" dirty="0">
+                <a:solidFill>
+                  <a:srgbClr val="111111"/>
+                </a:solidFill>
+                <a:latin typeface="Times New Roman" pitchFamily="34" charset="0"/>
+                <a:ea typeface="Times New Roman" pitchFamily="34" charset="-122"/>
+                <a:cs typeface="Times New Roman" pitchFamily="34" charset="-120"/>
+              </a:rPr>
+              <a:t>Transfer of heat by contact is ______.</a:t>
+            </a:r>
+            <a:endParaRPr lang="en-US" sz="4000" dirty="0"/>
+          </a:p>
+          <a:p>
+            <a:pPr algn="l" marL="342900" indent="-342900">
+              <a:spcAft>
+                <a:spcPts val="800"/>
+              </a:spcAft>
+              <a:buSzPct val="100000"/>
+              <a:buFont typeface="+mj-lt"/>
+              <a:buAutoNum type="arabicPeriod" startAt="1"/>
+            </a:pPr>
+            <a:r>
+              <a:rPr lang="en-US" sz="4000" dirty="0">
+                <a:solidFill>
+                  <a:srgbClr val="111111"/>
+                </a:solidFill>
+                <a:latin typeface="Times New Roman" pitchFamily="34" charset="0"/>
+                <a:ea typeface="Times New Roman" pitchFamily="34" charset="-122"/>
+                <a:cs typeface="Times New Roman" pitchFamily="34" charset="-120"/>
+              </a:rPr>
+              <a:t>Rising warm air is an example of ______.</a:t>
+            </a:r>
+            <a:endParaRPr lang="en-US" sz="4000" dirty="0"/>
+          </a:p>
+          <a:p>
+            <a:pPr algn="l" marL="342900" indent="-342900">
+              <a:spcAft>
+                <a:spcPts val="800"/>
+              </a:spcAft>
+              <a:buSzPct val="100000"/>
+              <a:buFont typeface="+mj-lt"/>
+              <a:buAutoNum type="arabicPeriod" startAt="1"/>
+            </a:pPr>
+            <a:r>
+              <a:rPr lang="en-US" sz="4000" dirty="0">
+                <a:solidFill>
+                  <a:srgbClr val="111111"/>
+                </a:solidFill>
+                <a:latin typeface="Times New Roman" pitchFamily="34" charset="0"/>
+                <a:ea typeface="Times New Roman" pitchFamily="34" charset="-122"/>
+                <a:cs typeface="Times New Roman" pitchFamily="34" charset="-120"/>
+              </a:rPr>
+              <a:t>Heat stored in water vapour is ______ heat.</a:t>
             </a:r>
             <a:endParaRPr lang="en-US" sz="4000" dirty="0"/>
           </a:p>
@@ -18344,7 +18196,7 @@
                 <a:ea typeface="Calibri" pitchFamily="34" charset="-122"/>
                 <a:cs typeface="Calibri" pitchFamily="34" charset="-120"/>
               </a:rPr>
-              <a:t>FORMATIVE EVALUATION</a:t>
+              <a:t>HOMEWORK</a:t>
             </a:r>
             <a:endParaRPr lang="en-US" sz="1400" dirty="0"/>
           </a:p>
@@ -18409,7 +18261,7 @@
                 <a:ea typeface="Times New Roman" pitchFamily="34" charset="-122"/>
                 <a:cs typeface="Times New Roman" pitchFamily="34" charset="-120"/>
               </a:rPr>
-              <a:t>Expected Answer</a:t>
+              <a:t>Homework</a:t>
             </a:r>
             <a:endParaRPr lang="en-US" sz="3600" dirty="0"/>
           </a:p>
@@ -18451,7 +18303,7 @@
                 <a:ea typeface="Times New Roman" pitchFamily="34" charset="-122"/>
                 <a:cs typeface="Times New Roman" pitchFamily="34" charset="-120"/>
               </a:rPr>
-              <a:t>Sunlight heats the ground first, and the ground then heats the air by radiation, conduction and convection.</a:t>
+              <a:t>State how temperature changes from the Equator to the poles.</a:t>
             </a:r>
             <a:endParaRPr lang="en-US" sz="4000" dirty="0"/>
           </a:p>
@@ -18563,7 +18415,7 @@
                 <a:ea typeface="Calibri" pitchFamily="34" charset="-122"/>
                 <a:cs typeface="Calibri" pitchFamily="34" charset="-120"/>
               </a:rPr>
-              <a:t>REMEDIATION</a:t>
+              <a:t>NEXT LESSON</a:t>
             </a:r>
             <a:endParaRPr lang="en-US" sz="1400" dirty="0"/>
           </a:p>
@@ -18586,7 +18438,7 @@
         <p:spPr>
           <a:xfrm>
             <a:off x="0" y="658368"/>
-            <a:ext cx="2468880" cy="5833872"/>
+            <a:ext cx="5120640" cy="5833872"/>
           </a:xfrm>
           <a:prstGeom prst="rect">
             <a:avLst/>
@@ -18601,8 +18453,8 @@
         </p:nvSpPr>
         <p:spPr>
           <a:xfrm>
-            <a:off x="2697480" y="1005840"/>
-            <a:ext cx="9174175" cy="731520"/>
+            <a:off x="5349240" y="1005840"/>
+            <a:ext cx="6522415" cy="731520"/>
           </a:xfrm>
           <a:prstGeom prst="rect">
             <a:avLst/>
@@ -18628,7 +18480,7 @@
                 <a:ea typeface="Times New Roman" pitchFamily="34" charset="-122"/>
                 <a:cs typeface="Times New Roman" pitchFamily="34" charset="-120"/>
               </a:rPr>
-              <a:t>Remediation</a:t>
+              <a:t>Next Lesson</a:t>
             </a:r>
             <a:endParaRPr lang="en-US" sz="3600" dirty="0"/>
           </a:p>
@@ -18642,8 +18494,8 @@
         </p:nvSpPr>
         <p:spPr>
           <a:xfrm>
-            <a:off x="2697480" y="1783080"/>
-            <a:ext cx="9174175" cy="4663440"/>
+            <a:off x="5349240" y="1783080"/>
+            <a:ext cx="6522415" cy="4663440"/>
           </a:xfrm>
           <a:prstGeom prst="rect">
             <a:avLst/>
@@ -18652,10 +18504,10 @@
           <a:ln/>
         </p:spPr>
         <p:txBody>
-          <a:bodyPr wrap="square" lIns="0" tIns="0" rIns="0" bIns="0" rtlCol="0" anchor="t"/>
-          <a:lstStyle/>
-          <a:p>
-            <a:pPr algn="l" indent="0" marL="0">
+          <a:bodyPr wrap="square" lIns="0" tIns="0" rIns="0" bIns="0" rtlCol="0" anchor="ctr"/>
+          <a:lstStyle/>
+          <a:p>
+            <a:pPr algn="ctr" indent="0" marL="0">
               <a:spcAft>
                 <a:spcPts val="800"/>
               </a:spcAft>
@@ -18670,73 +18522,27 @@
                 <a:ea typeface="Times New Roman" pitchFamily="34" charset="-122"/>
                 <a:cs typeface="Times New Roman" pitchFamily="34" charset="-120"/>
               </a:rPr>
-              <a:t>Fill in the blanks:</a:t>
+              <a:t>Our next lesson will be on:</a:t>
             </a:r>
             <a:endParaRPr lang="en-US" sz="4000" dirty="0"/>
           </a:p>
           <a:p>
-            <a:pPr algn="l" marL="342900" indent="-342900">
+            <a:pPr algn="ctr" indent="0" marL="0">
               <a:spcAft>
                 <a:spcPts val="800"/>
               </a:spcAft>
-              <a:buSzPct val="100000"/>
-              <a:buFont typeface="+mj-lt"/>
-              <a:buAutoNum type="arabicPeriod" startAt="1"/>
+              <a:buNone/>
             </a:pPr>
             <a:r>
-              <a:rPr lang="en-US" sz="4000" dirty="0">
-                <a:solidFill>
-                  <a:srgbClr val="111111"/>
+              <a:rPr lang="en-US" sz="4000" b="1" dirty="0">
+                <a:solidFill>
+                  <a:srgbClr val="990011"/>
                 </a:solidFill>
                 <a:latin typeface="Times New Roman" pitchFamily="34" charset="0"/>
                 <a:ea typeface="Times New Roman" pitchFamily="34" charset="-122"/>
                 <a:cs typeface="Times New Roman" pitchFamily="34" charset="-120"/>
               </a:rPr>
-              <a:t>Transfer of heat by contact is ______.</a:t>
-            </a:r>
-            <a:endParaRPr lang="en-US" sz="4000" dirty="0"/>
-          </a:p>
-          <a:p>
-            <a:pPr algn="l" marL="342900" indent="-342900">
-              <a:spcAft>
-                <a:spcPts val="800"/>
-              </a:spcAft>
-              <a:buSzPct val="100000"/>
-              <a:buFont typeface="+mj-lt"/>
-              <a:buAutoNum type="arabicPeriod" startAt="1"/>
-            </a:pPr>
-            <a:r>
-              <a:rPr lang="en-US" sz="4000" dirty="0">
-                <a:solidFill>
-                  <a:srgbClr val="111111"/>
-                </a:solidFill>
-                <a:latin typeface="Times New Roman" pitchFamily="34" charset="0"/>
-                <a:ea typeface="Times New Roman" pitchFamily="34" charset="-122"/>
-                <a:cs typeface="Times New Roman" pitchFamily="34" charset="-120"/>
-              </a:rPr>
-              <a:t>Rising warm air is an example of ______.</a:t>
-            </a:r>
-            <a:endParaRPr lang="en-US" sz="4000" dirty="0"/>
-          </a:p>
-          <a:p>
-            <a:pPr algn="l" marL="342900" indent="-342900">
-              <a:spcAft>
-                <a:spcPts val="800"/>
-              </a:spcAft>
-              <a:buSzPct val="100000"/>
-              <a:buFont typeface="+mj-lt"/>
-              <a:buAutoNum type="arabicPeriod" startAt="1"/>
-            </a:pPr>
-            <a:r>
-              <a:rPr lang="en-US" sz="4000" dirty="0">
-                <a:solidFill>
-                  <a:srgbClr val="111111"/>
-                </a:solidFill>
-                <a:latin typeface="Times New Roman" pitchFamily="34" charset="0"/>
-                <a:ea typeface="Times New Roman" pitchFamily="34" charset="-122"/>
-                <a:cs typeface="Times New Roman" pitchFamily="34" charset="-120"/>
-              </a:rPr>
-              <a:t>Heat stored in water vapour is ______ heat.</a:t>
+              <a:t>Lesson 6: Latitudinal Distribution of Temperature</a:t>
             </a:r>
             <a:endParaRPr lang="en-US" sz="4000" dirty="0"/>
           </a:p>
@@ -18848,464 +18654,6 @@
                 <a:ea typeface="Calibri" pitchFamily="34" charset="-122"/>
                 <a:cs typeface="Calibri" pitchFamily="34" charset="-120"/>
               </a:rPr>
-              <a:t>HOMEWORK</a:t>
-            </a:r>
-            <a:endParaRPr lang="en-US" sz="1400" dirty="0"/>
-          </a:p>
-        </p:txBody>
-      </p:sp>
-      <p:pic>
-        <p:nvPicPr>
-          <p:cNvPr id="3" name="Image 0" descr="/home/claude/f4/img/minesec_sheet.png">    </p:cNvPr>
-          <p:cNvPicPr>
-            <a:picLocks noChangeAspect="1"/>
-          </p:cNvPicPr>
-          <p:nvPr/>
-        </p:nvPicPr>
-        <p:blipFill>
-          <a:blip r:embed="rId1"/>
-          <a:stretch>
-            <a:fillRect/>
-          </a:stretch>
-        </p:blipFill>
-        <p:spPr>
-          <a:xfrm>
-            <a:off x="0" y="658368"/>
-            <a:ext cx="5120640" cy="5833872"/>
-          </a:xfrm>
-          <a:prstGeom prst="rect">
-            <a:avLst/>
-          </a:prstGeom>
-        </p:spPr>
-      </p:pic>
-      <p:sp>
-        <p:nvSpPr>
-          <p:cNvPr id="4" name="Text 1"/>
-          <p:cNvSpPr/>
-          <p:nvPr/>
-        </p:nvSpPr>
-        <p:spPr>
-          <a:xfrm>
-            <a:off x="5349240" y="1005840"/>
-            <a:ext cx="6522415" cy="731520"/>
-          </a:xfrm>
-          <a:prstGeom prst="rect">
-            <a:avLst/>
-          </a:prstGeom>
-          <a:noFill/>
-          <a:ln/>
-        </p:spPr>
-        <p:txBody>
-          <a:bodyPr wrap="square" lIns="0" tIns="0" rIns="0" bIns="0" rtlCol="0" anchor="ctr">
-            <a:normAutofit/>
-          </a:bodyPr>
-          <a:lstStyle/>
-          <a:p>
-            <a:pPr algn="ctr" indent="0" marL="0">
-              <a:buNone/>
-            </a:pPr>
-            <a:r>
-              <a:rPr lang="en-US" sz="3600" b="1" dirty="0">
-                <a:solidFill>
-                  <a:srgbClr val="990011"/>
-                </a:solidFill>
-                <a:latin typeface="Times New Roman" pitchFamily="34" charset="0"/>
-                <a:ea typeface="Times New Roman" pitchFamily="34" charset="-122"/>
-                <a:cs typeface="Times New Roman" pitchFamily="34" charset="-120"/>
-              </a:rPr>
-              <a:t>Homework</a:t>
-            </a:r>
-            <a:endParaRPr lang="en-US" sz="3600" dirty="0"/>
-          </a:p>
-        </p:txBody>
-      </p:sp>
-      <p:sp>
-        <p:nvSpPr>
-          <p:cNvPr id="5" name="Text 2"/>
-          <p:cNvSpPr/>
-          <p:nvPr/>
-        </p:nvSpPr>
-        <p:spPr>
-          <a:xfrm>
-            <a:off x="5349240" y="1783080"/>
-            <a:ext cx="6522415" cy="4663440"/>
-          </a:xfrm>
-          <a:prstGeom prst="rect">
-            <a:avLst/>
-          </a:prstGeom>
-          <a:noFill/>
-          <a:ln/>
-        </p:spPr>
-        <p:txBody>
-          <a:bodyPr wrap="square" lIns="0" tIns="0" rIns="0" bIns="0" rtlCol="0" anchor="t"/>
-          <a:lstStyle/>
-          <a:p>
-            <a:pPr algn="l" indent="0" marL="0">
-              <a:spcAft>
-                <a:spcPts val="800"/>
-              </a:spcAft>
-              <a:buNone/>
-            </a:pPr>
-            <a:r>
-              <a:rPr lang="en-US" sz="4000" dirty="0">
-                <a:solidFill>
-                  <a:srgbClr val="111111"/>
-                </a:solidFill>
-                <a:latin typeface="Times New Roman" pitchFamily="34" charset="0"/>
-                <a:ea typeface="Times New Roman" pitchFamily="34" charset="-122"/>
-                <a:cs typeface="Times New Roman" pitchFamily="34" charset="-120"/>
-              </a:rPr>
-              <a:t>State how temperature changes from the Equator to the poles.</a:t>
-            </a:r>
-            <a:endParaRPr lang="en-US" sz="4000" dirty="0"/>
-          </a:p>
-        </p:txBody>
-      </p:sp>
-      <p:sp>
-        <p:nvSpPr>
-          <p:cNvPr id="25" name="Slide Number Placeholder 0"/>
-          <p:cNvSpPr>
-            <a:spLocks noGrp="1"/>
-          </p:cNvSpPr>
-          <p:nvPr>
-            <p:ph type="sldNum" sz="quarter" idx="4294967295"/>
-          </p:nvPr>
-        </p:nvSpPr>
-        <p:spPr>
-          <a:xfrm>
-            <a:off x="27432" y="91440"/>
-            <a:ext cx="585216" cy="475488"/>
-          </a:xfrm>
-          <a:prstGeom prst="rect">
-            <a:avLst/>
-          </a:prstGeom>
-          <a:extLst>
-            <a:ext uri="{C572A759-6A51-4108-AA02-DFA0A04FC94B}">
-              <ma14:wrappingTextBoxFlag xmlns:ma14="http://schemas.microsoft.com/office/mac/drawingml/2011/main" val="0"/>
-            </a:ext>
-          </a:extLst>
-        </p:spPr>
-        <p:txBody>
-          <a:bodyPr/>
-          <a:lstStyle>
-            <a:lvl1pPr>
-              <a:defRPr sz="2000">
-                <a:solidFill>
-                  <a:srgbClr val="FFFFFF"/>
-                </a:solidFill>
-                <a:latin typeface="Calibri"/>
-                <a:ea typeface="Calibri"/>
-                <a:cs typeface="Calibri"/>
-              </a:defRPr>
-            </a:lvl1pPr>
-          </a:lstStyle>
-          <a:p>
-            <a:pPr algn="ctr"/>
-            <a:fld id="{F7021451-1387-4CA6-816F-3879F97B5CBC}" type="slidenum">
-              <a:rPr b="1" lang="en-US"/>
-              <a:t>52</a:t>
-            </a:fld>
-            <a:endParaRPr lang="en-US"/>
-          </a:p>
-        </p:txBody>
-      </p:sp>
-    </p:spTree>
-  </p:cSld>
-  <p:clrMapOvr>
-    <a:masterClrMapping/>
-  </p:clrMapOvr>
-</p:sld>
-</file>
-
-<file path=ppt/slides/slide53.xml><?xml version="1.0" encoding="utf-8"?>
-<p:sld xmlns:a="http://schemas.openxmlformats.org/drawingml/2006/main" xmlns:r="http://schemas.openxmlformats.org/officeDocument/2006/relationships" xmlns:p="http://schemas.openxmlformats.org/presentationml/2006/main">
-  <p:cSld name="Slide 53">
-    <p:spTree>
-      <p:nvGrpSpPr>
-        <p:cNvPr id="1" name=""/>
-        <p:cNvGrpSpPr/>
-        <p:nvPr/>
-      </p:nvGrpSpPr>
-      <p:grpSpPr>
-        <a:xfrm>
-          <a:off x="0" y="0"/>
-          <a:ext cx="0" cy="0"/>
-          <a:chOff x="0" y="0"/>
-          <a:chExt cx="0" cy="0"/>
-        </a:xfrm>
-      </p:grpSpPr>
-      <p:sp>
-        <p:nvSpPr>
-          <p:cNvPr id="2" name="Text 0"/>
-          <p:cNvSpPr/>
-          <p:nvPr/>
-        </p:nvSpPr>
-        <p:spPr>
-          <a:xfrm>
-            <a:off x="457200" y="713232"/>
-            <a:ext cx="11368735" cy="274320"/>
-          </a:xfrm>
-          <a:prstGeom prst="rect">
-            <a:avLst/>
-          </a:prstGeom>
-          <a:noFill/>
-          <a:ln/>
-        </p:spPr>
-        <p:txBody>
-          <a:bodyPr wrap="square" lIns="0" tIns="0" rIns="0" bIns="0" rtlCol="0" anchor="ctr"/>
-          <a:lstStyle/>
-          <a:p>
-            <a:pPr algn="r" indent="0" marL="0">
-              <a:buNone/>
-            </a:pPr>
-            <a:r>
-              <a:rPr lang="en-US" sz="1400" b="1" dirty="0">
-                <a:solidFill>
-                  <a:srgbClr val="1C3F6E"/>
-                </a:solidFill>
-                <a:latin typeface="Calibri" pitchFamily="34" charset="0"/>
-                <a:ea typeface="Calibri" pitchFamily="34" charset="-122"/>
-                <a:cs typeface="Calibri" pitchFamily="34" charset="-120"/>
-              </a:rPr>
-              <a:t>NEXT LESSON</a:t>
-            </a:r>
-            <a:endParaRPr lang="en-US" sz="1400" dirty="0"/>
-          </a:p>
-        </p:txBody>
-      </p:sp>
-      <p:pic>
-        <p:nvPicPr>
-          <p:cNvPr id="3" name="Image 0" descr="/home/claude/f4/img/minesec_sheet.png">    </p:cNvPr>
-          <p:cNvPicPr>
-            <a:picLocks noChangeAspect="1"/>
-          </p:cNvPicPr>
-          <p:nvPr/>
-        </p:nvPicPr>
-        <p:blipFill>
-          <a:blip r:embed="rId1"/>
-          <a:stretch>
-            <a:fillRect/>
-          </a:stretch>
-        </p:blipFill>
-        <p:spPr>
-          <a:xfrm>
-            <a:off x="0" y="658368"/>
-            <a:ext cx="5120640" cy="5833872"/>
-          </a:xfrm>
-          <a:prstGeom prst="rect">
-            <a:avLst/>
-          </a:prstGeom>
-        </p:spPr>
-      </p:pic>
-      <p:sp>
-        <p:nvSpPr>
-          <p:cNvPr id="4" name="Text 1"/>
-          <p:cNvSpPr/>
-          <p:nvPr/>
-        </p:nvSpPr>
-        <p:spPr>
-          <a:xfrm>
-            <a:off x="5349240" y="1005840"/>
-            <a:ext cx="6522415" cy="731520"/>
-          </a:xfrm>
-          <a:prstGeom prst="rect">
-            <a:avLst/>
-          </a:prstGeom>
-          <a:noFill/>
-          <a:ln/>
-        </p:spPr>
-        <p:txBody>
-          <a:bodyPr wrap="square" lIns="0" tIns="0" rIns="0" bIns="0" rtlCol="0" anchor="ctr">
-            <a:normAutofit/>
-          </a:bodyPr>
-          <a:lstStyle/>
-          <a:p>
-            <a:pPr algn="ctr" indent="0" marL="0">
-              <a:buNone/>
-            </a:pPr>
-            <a:r>
-              <a:rPr lang="en-US" sz="3600" b="1" dirty="0">
-                <a:solidFill>
-                  <a:srgbClr val="990011"/>
-                </a:solidFill>
-                <a:latin typeface="Times New Roman" pitchFamily="34" charset="0"/>
-                <a:ea typeface="Times New Roman" pitchFamily="34" charset="-122"/>
-                <a:cs typeface="Times New Roman" pitchFamily="34" charset="-120"/>
-              </a:rPr>
-              <a:t>Next Lesson</a:t>
-            </a:r>
-            <a:endParaRPr lang="en-US" sz="3600" dirty="0"/>
-          </a:p>
-        </p:txBody>
-      </p:sp>
-      <p:sp>
-        <p:nvSpPr>
-          <p:cNvPr id="5" name="Text 2"/>
-          <p:cNvSpPr/>
-          <p:nvPr/>
-        </p:nvSpPr>
-        <p:spPr>
-          <a:xfrm>
-            <a:off x="5349240" y="1783080"/>
-            <a:ext cx="6522415" cy="4663440"/>
-          </a:xfrm>
-          <a:prstGeom prst="rect">
-            <a:avLst/>
-          </a:prstGeom>
-          <a:noFill/>
-          <a:ln/>
-        </p:spPr>
-        <p:txBody>
-          <a:bodyPr wrap="square" lIns="0" tIns="0" rIns="0" bIns="0" rtlCol="0" anchor="ctr"/>
-          <a:lstStyle/>
-          <a:p>
-            <a:pPr algn="ctr" indent="0" marL="0">
-              <a:spcAft>
-                <a:spcPts val="800"/>
-              </a:spcAft>
-              <a:buNone/>
-            </a:pPr>
-            <a:r>
-              <a:rPr lang="en-US" sz="4000" b="1" dirty="0">
-                <a:solidFill>
-                  <a:srgbClr val="111111"/>
-                </a:solidFill>
-                <a:latin typeface="Times New Roman" pitchFamily="34" charset="0"/>
-                <a:ea typeface="Times New Roman" pitchFamily="34" charset="-122"/>
-                <a:cs typeface="Times New Roman" pitchFamily="34" charset="-120"/>
-              </a:rPr>
-              <a:t>Our next lesson will be on:</a:t>
-            </a:r>
-            <a:endParaRPr lang="en-US" sz="4000" dirty="0"/>
-          </a:p>
-          <a:p>
-            <a:pPr algn="ctr" indent="0" marL="0">
-              <a:spcAft>
-                <a:spcPts val="800"/>
-              </a:spcAft>
-              <a:buNone/>
-            </a:pPr>
-            <a:r>
-              <a:rPr lang="en-US" sz="4000" b="1" dirty="0">
-                <a:solidFill>
-                  <a:srgbClr val="990011"/>
-                </a:solidFill>
-                <a:latin typeface="Times New Roman" pitchFamily="34" charset="0"/>
-                <a:ea typeface="Times New Roman" pitchFamily="34" charset="-122"/>
-                <a:cs typeface="Times New Roman" pitchFamily="34" charset="-120"/>
-              </a:rPr>
-              <a:t>Lesson 6: Latitudinal Distribution of Temperature</a:t>
-            </a:r>
-            <a:endParaRPr lang="en-US" sz="4000" dirty="0"/>
-          </a:p>
-        </p:txBody>
-      </p:sp>
-      <p:sp>
-        <p:nvSpPr>
-          <p:cNvPr id="25" name="Slide Number Placeholder 0"/>
-          <p:cNvSpPr>
-            <a:spLocks noGrp="1"/>
-          </p:cNvSpPr>
-          <p:nvPr>
-            <p:ph type="sldNum" sz="quarter" idx="4294967295"/>
-          </p:nvPr>
-        </p:nvSpPr>
-        <p:spPr>
-          <a:xfrm>
-            <a:off x="27432" y="91440"/>
-            <a:ext cx="585216" cy="475488"/>
-          </a:xfrm>
-          <a:prstGeom prst="rect">
-            <a:avLst/>
-          </a:prstGeom>
-          <a:extLst>
-            <a:ext uri="{C572A759-6A51-4108-AA02-DFA0A04FC94B}">
-              <ma14:wrappingTextBoxFlag xmlns:ma14="http://schemas.microsoft.com/office/mac/drawingml/2011/main" val="0"/>
-            </a:ext>
-          </a:extLst>
-        </p:spPr>
-        <p:txBody>
-          <a:bodyPr/>
-          <a:lstStyle>
-            <a:lvl1pPr>
-              <a:defRPr sz="2000">
-                <a:solidFill>
-                  <a:srgbClr val="FFFFFF"/>
-                </a:solidFill>
-                <a:latin typeface="Calibri"/>
-                <a:ea typeface="Calibri"/>
-                <a:cs typeface="Calibri"/>
-              </a:defRPr>
-            </a:lvl1pPr>
-          </a:lstStyle>
-          <a:p>
-            <a:pPr algn="ctr"/>
-            <a:fld id="{F7021451-1387-4CA6-816F-3879F97B5CBC}" type="slidenum">
-              <a:rPr b="1" lang="en-US"/>
-              <a:t>53</a:t>
-            </a:fld>
-            <a:endParaRPr lang="en-US"/>
-          </a:p>
-        </p:txBody>
-      </p:sp>
-    </p:spTree>
-  </p:cSld>
-  <p:clrMapOvr>
-    <a:masterClrMapping/>
-  </p:clrMapOvr>
-</p:sld>
-</file>
-
-<file path=ppt/slides/slide54.xml><?xml version="1.0" encoding="utf-8"?>
-<p:sld xmlns:a="http://schemas.openxmlformats.org/drawingml/2006/main" xmlns:r="http://schemas.openxmlformats.org/officeDocument/2006/relationships" xmlns:p="http://schemas.openxmlformats.org/presentationml/2006/main">
-  <p:cSld name="Slide 54">
-    <p:spTree>
-      <p:nvGrpSpPr>
-        <p:cNvPr id="1" name=""/>
-        <p:cNvGrpSpPr/>
-        <p:nvPr/>
-      </p:nvGrpSpPr>
-      <p:grpSpPr>
-        <a:xfrm>
-          <a:off x="0" y="0"/>
-          <a:ext cx="0" cy="0"/>
-          <a:chOff x="0" y="0"/>
-          <a:chExt cx="0" cy="0"/>
-        </a:xfrm>
-      </p:grpSpPr>
-      <p:sp>
-        <p:nvSpPr>
-          <p:cNvPr id="2" name="Text 0"/>
-          <p:cNvSpPr/>
-          <p:nvPr/>
-        </p:nvSpPr>
-        <p:spPr>
-          <a:xfrm>
-            <a:off x="457200" y="713232"/>
-            <a:ext cx="11368735" cy="274320"/>
-          </a:xfrm>
-          <a:prstGeom prst="rect">
-            <a:avLst/>
-          </a:prstGeom>
-          <a:noFill/>
-          <a:ln/>
-        </p:spPr>
-        <p:txBody>
-          <a:bodyPr wrap="square" lIns="0" tIns="0" rIns="0" bIns="0" rtlCol="0" anchor="ctr"/>
-          <a:lstStyle/>
-          <a:p>
-            <a:pPr algn="r" indent="0" marL="0">
-              <a:buNone/>
-            </a:pPr>
-            <a:r>
-              <a:rPr lang="en-US" sz="1400" b="1" dirty="0">
-                <a:solidFill>
-                  <a:srgbClr val="1C3F6E"/>
-                </a:solidFill>
-                <a:latin typeface="Calibri" pitchFamily="34" charset="0"/>
-                <a:ea typeface="Calibri" pitchFamily="34" charset="-122"/>
-                <a:cs typeface="Calibri" pitchFamily="34" charset="-120"/>
-              </a:rPr>
               <a:t>BILINGUAL GAME</a:t>
             </a:r>
             <a:endParaRPr lang="en-US" sz="1400" dirty="0"/>
@@ -19353,7 +18701,7 @@
       </p:sp>
       <p:graphicFrame>
         <p:nvGraphicFramePr>
-          <p:cNvPr id="55" name="Table 0"/>
+          <p:cNvPr id="53" name="Table 0"/>
           <p:cNvGraphicFramePr>
             <a:graphicFrameLocks noGrp="1"/>
           </p:cNvGraphicFramePr>
@@ -20389,7 +19737,7 @@
             <a:pPr algn="ctr"/>
             <a:fld id="{F7021451-1387-4CA6-816F-3879F97B5CBC}" type="slidenum">
               <a:rPr b="1" lang="en-US"/>
-              <a:t>54</a:t>
+              <a:t>52</a:t>
             </a:fld>
             <a:endParaRPr lang="en-US"/>
           </a:p>
@@ -20403,9 +19751,9 @@
 </p:sld>
 </file>
 
-<file path=ppt/slides/slide55.xml><?xml version="1.0" encoding="utf-8"?>
+<file path=ppt/slides/slide53.xml><?xml version="1.0" encoding="utf-8"?>
 <p:sld xmlns:a="http://schemas.openxmlformats.org/drawingml/2006/main" xmlns:r="http://schemas.openxmlformats.org/officeDocument/2006/relationships" xmlns:p="http://schemas.openxmlformats.org/presentationml/2006/main">
-  <p:cSld name="Slide 55">
+  <p:cSld name="Slide 53">
     <p:spTree>
       <p:nvGrpSpPr>
         <p:cNvPr id="1" name=""/>
@@ -20500,7 +19848,7 @@
       </p:sp>
       <p:graphicFrame>
         <p:nvGraphicFramePr>
-          <p:cNvPr id="56" name="Table 0"/>
+          <p:cNvPr id="54" name="Table 0"/>
           <p:cNvGraphicFramePr>
             <a:graphicFrameLocks noGrp="1"/>
           </p:cNvGraphicFramePr>
@@ -21122,7 +20470,7 @@
             <a:pPr algn="ctr"/>
             <a:fld id="{F7021451-1387-4CA6-816F-3879F97B5CBC}" type="slidenum">
               <a:rPr b="1" lang="en-US"/>
-              <a:t>55</a:t>
+              <a:t>53</a:t>
             </a:fld>
             <a:endParaRPr lang="en-US"/>
           </a:p>
@@ -21136,9 +20484,9 @@
 </p:sld>
 </file>
 
-<file path=ppt/slides/slide56.xml><?xml version="1.0" encoding="utf-8"?>
+<file path=ppt/slides/slide54.xml><?xml version="1.0" encoding="utf-8"?>
 <p:sld xmlns:a="http://schemas.openxmlformats.org/drawingml/2006/main" xmlns:r="http://schemas.openxmlformats.org/officeDocument/2006/relationships" xmlns:p="http://schemas.openxmlformats.org/presentationml/2006/main">
-  <p:cSld name="Slide 56">
+  <p:cSld name="Slide 54">
     <p:spTree>
       <p:nvGrpSpPr>
         <p:cNvPr id="1" name=""/>
@@ -21233,7 +20581,7 @@
       </p:sp>
       <p:graphicFrame>
         <p:nvGraphicFramePr>
-          <p:cNvPr id="57" name="Table 0"/>
+          <p:cNvPr id="55" name="Table 0"/>
           <p:cNvGraphicFramePr>
             <a:graphicFrameLocks noGrp="1"/>
           </p:cNvGraphicFramePr>
@@ -21993,7 +21341,7 @@
             <a:pPr algn="ctr"/>
             <a:fld id="{F7021451-1387-4CA6-816F-3879F97B5CBC}" type="slidenum">
               <a:rPr b="1" lang="en-US"/>
-              <a:t>56</a:t>
+              <a:t>54</a:t>
             </a:fld>
             <a:endParaRPr lang="en-US"/>
           </a:p>
@@ -22007,9 +21355,9 @@
 </p:sld>
 </file>
 
-<file path=ppt/slides/slide57.xml><?xml version="1.0" encoding="utf-8"?>
+<file path=ppt/slides/slide55.xml><?xml version="1.0" encoding="utf-8"?>
 <p:sld xmlns:a="http://schemas.openxmlformats.org/drawingml/2006/main" xmlns:r="http://schemas.openxmlformats.org/officeDocument/2006/relationships" xmlns:p="http://schemas.openxmlformats.org/presentationml/2006/main">
-  <p:cSld name="Slide 57">
+  <p:cSld name="Slide 55">
     <p:spTree>
       <p:nvGrpSpPr>
         <p:cNvPr id="1" name=""/>
@@ -22339,7 +21687,7 @@
             <a:pPr algn="ctr"/>
             <a:fld id="{F7021451-1387-4CA6-816F-3879F97B5CBC}" type="slidenum">
               <a:rPr b="1" lang="en-US"/>
-              <a:t>57</a:t>
+              <a:t>55</a:t>
             </a:fld>
             <a:endParaRPr lang="en-US"/>
           </a:p>
@@ -22353,9 +21701,9 @@
 </p:sld>
 </file>
 
-<file path=ppt/slides/slide58.xml><?xml version="1.0" encoding="utf-8"?>
+<file path=ppt/slides/slide56.xml><?xml version="1.0" encoding="utf-8"?>
 <p:sld xmlns:a="http://schemas.openxmlformats.org/drawingml/2006/main" xmlns:r="http://schemas.openxmlformats.org/officeDocument/2006/relationships" xmlns:p="http://schemas.openxmlformats.org/presentationml/2006/main">
-  <p:cSld name="Slide 58">
+  <p:cSld name="Slide 56">
     <p:spTree>
       <p:nvGrpSpPr>
         <p:cNvPr id="1" name=""/>
@@ -22643,7 +21991,7 @@
             <a:pPr algn="ctr"/>
             <a:fld id="{F7021451-1387-4CA6-816F-3879F97B5CBC}" type="slidenum">
               <a:rPr b="1" lang="en-US"/>
-              <a:t>58</a:t>
+              <a:t>56</a:t>
             </a:fld>
             <a:endParaRPr lang="en-US"/>
           </a:p>
